--- a/resources/ANPR_First_Review_.pptx
+++ b/resources/ANPR_First_Review_.pptx
@@ -5,7 +5,7 @@
     <p:sldMasterId id="2147483648" r:id="rId1"/>
   </p:sldMasterIdLst>
   <p:notesMasterIdLst>
-    <p:notesMasterId r:id="rId14"/>
+    <p:notesMasterId r:id="rId15"/>
   </p:notesMasterIdLst>
   <p:sldIdLst>
     <p:sldId id="256" r:id="rId2"/>
@@ -15,11 +15,12 @@
     <p:sldId id="260" r:id="rId6"/>
     <p:sldId id="261" r:id="rId7"/>
     <p:sldId id="262" r:id="rId8"/>
-    <p:sldId id="263" r:id="rId9"/>
-    <p:sldId id="266" r:id="rId10"/>
-    <p:sldId id="264" r:id="rId11"/>
-    <p:sldId id="265" r:id="rId12"/>
-    <p:sldId id="267" r:id="rId13"/>
+    <p:sldId id="268" r:id="rId9"/>
+    <p:sldId id="263" r:id="rId10"/>
+    <p:sldId id="266" r:id="rId11"/>
+    <p:sldId id="264" r:id="rId12"/>
+    <p:sldId id="265" r:id="rId13"/>
+    <p:sldId id="267" r:id="rId14"/>
   </p:sldIdLst>
   <p:sldSz cx="9144000" cy="5143500" type="screen16x9"/>
   <p:notesSz cx="5143500" cy="9144000"/>
@@ -276,6 +277,13 @@
           </p:nvPr>
         </p:nvSpPr>
         <p:spPr/>
+        <p:txBody>
+          <a:bodyPr/>
+          <a:lstStyle/>
+          <a:p>
+            <a:endParaRPr lang="en-IN"/>
+          </a:p>
+        </p:txBody>
       </p:sp>
       <p:sp>
         <p:nvSpPr>
@@ -360,6 +368,13 @@
           </p:nvPr>
         </p:nvSpPr>
         <p:spPr/>
+        <p:txBody>
+          <a:bodyPr/>
+          <a:lstStyle/>
+          <a:p>
+            <a:endParaRPr lang="en-IN"/>
+          </a:p>
+        </p:txBody>
       </p:sp>
       <p:sp>
         <p:nvSpPr>
@@ -397,7 +412,7 @@
           <a:p>
             <a:fld id="{F7021451-1387-4CA6-816F-3879F97B5CBC}" type="slidenum">
               <a:rPr lang="en-US"/>
-              <a:t>10</a:t>
+              <a:t>11</a:t>
             </a:fld>
             <a:endParaRPr lang="en-US"/>
           </a:p>
@@ -444,6 +459,13 @@
           </p:nvPr>
         </p:nvSpPr>
         <p:spPr/>
+        <p:txBody>
+          <a:bodyPr/>
+          <a:lstStyle/>
+          <a:p>
+            <a:endParaRPr lang="en-IN"/>
+          </a:p>
+        </p:txBody>
       </p:sp>
       <p:sp>
         <p:nvSpPr>
@@ -481,7 +503,7 @@
           <a:p>
             <a:fld id="{F7021451-1387-4CA6-816F-3879F97B5CBC}" type="slidenum">
               <a:rPr lang="en-US"/>
-              <a:t>11</a:t>
+              <a:t>12</a:t>
             </a:fld>
             <a:endParaRPr lang="en-US"/>
           </a:p>
@@ -528,6 +550,13 @@
           </p:nvPr>
         </p:nvSpPr>
         <p:spPr/>
+        <p:txBody>
+          <a:bodyPr/>
+          <a:lstStyle/>
+          <a:p>
+            <a:endParaRPr lang="en-IN"/>
+          </a:p>
+        </p:txBody>
       </p:sp>
       <p:sp>
         <p:nvSpPr>
@@ -565,7 +594,7 @@
           <a:p>
             <a:fld id="{F7021451-1387-4CA6-816F-3879F97B5CBC}" type="slidenum">
               <a:rPr lang="en-US"/>
-              <a:t>12</a:t>
+              <a:t>13</a:t>
             </a:fld>
             <a:endParaRPr lang="en-US"/>
           </a:p>
@@ -612,6 +641,13 @@
           </p:nvPr>
         </p:nvSpPr>
         <p:spPr/>
+        <p:txBody>
+          <a:bodyPr/>
+          <a:lstStyle/>
+          <a:p>
+            <a:endParaRPr lang="en-IN"/>
+          </a:p>
+        </p:txBody>
       </p:sp>
       <p:sp>
         <p:nvSpPr>
@@ -696,6 +732,13 @@
           </p:nvPr>
         </p:nvSpPr>
         <p:spPr/>
+        <p:txBody>
+          <a:bodyPr/>
+          <a:lstStyle/>
+          <a:p>
+            <a:endParaRPr lang="en-IN"/>
+          </a:p>
+        </p:txBody>
       </p:sp>
       <p:sp>
         <p:nvSpPr>
@@ -780,6 +823,13 @@
           </p:nvPr>
         </p:nvSpPr>
         <p:spPr/>
+        <p:txBody>
+          <a:bodyPr/>
+          <a:lstStyle/>
+          <a:p>
+            <a:endParaRPr lang="en-IN"/>
+          </a:p>
+        </p:txBody>
       </p:sp>
       <p:sp>
         <p:nvSpPr>
@@ -864,6 +914,13 @@
           </p:nvPr>
         </p:nvSpPr>
         <p:spPr/>
+        <p:txBody>
+          <a:bodyPr/>
+          <a:lstStyle/>
+          <a:p>
+            <a:endParaRPr lang="en-IN"/>
+          </a:p>
+        </p:txBody>
       </p:sp>
       <p:sp>
         <p:nvSpPr>
@@ -948,6 +1005,13 @@
           </p:nvPr>
         </p:nvSpPr>
         <p:spPr/>
+        <p:txBody>
+          <a:bodyPr/>
+          <a:lstStyle/>
+          <a:p>
+            <a:endParaRPr lang="en-IN"/>
+          </a:p>
+        </p:txBody>
       </p:sp>
       <p:sp>
         <p:nvSpPr>
@@ -1032,6 +1096,13 @@
           </p:nvPr>
         </p:nvSpPr>
         <p:spPr/>
+        <p:txBody>
+          <a:bodyPr/>
+          <a:lstStyle/>
+          <a:p>
+            <a:endParaRPr lang="en-IN"/>
+          </a:p>
+        </p:txBody>
       </p:sp>
       <p:sp>
         <p:nvSpPr>
@@ -1116,6 +1187,13 @@
           </p:nvPr>
         </p:nvSpPr>
         <p:spPr/>
+        <p:txBody>
+          <a:bodyPr/>
+          <a:lstStyle/>
+          <a:p>
+            <a:endParaRPr lang="en-IN"/>
+          </a:p>
+        </p:txBody>
       </p:sp>
       <p:sp>
         <p:nvSpPr>
@@ -1153,7 +1231,7 @@
           <a:p>
             <a:fld id="{F7021451-1387-4CA6-816F-3879F97B5CBC}" type="slidenum">
               <a:rPr lang="en-US"/>
-              <a:t>8</a:t>
+              <a:t>9</a:t>
             </a:fld>
             <a:endParaRPr lang="en-US"/>
           </a:p>
@@ -1200,6 +1278,13 @@
           </p:nvPr>
         </p:nvSpPr>
         <p:spPr/>
+        <p:txBody>
+          <a:bodyPr/>
+          <a:lstStyle/>
+          <a:p>
+            <a:endParaRPr lang="en-IN"/>
+          </a:p>
+        </p:txBody>
       </p:sp>
       <p:sp>
         <p:nvSpPr>
@@ -1237,7 +1322,7 @@
           <a:p>
             <a:fld id="{F7021451-1387-4CA6-816F-3879F97B5CBC}" type="slidenum">
               <a:rPr lang="en-US"/>
-              <a:t>9</a:t>
+              <a:t>10</a:t>
             </a:fld>
             <a:endParaRPr lang="en-US"/>
           </a:p>
@@ -1617,6 +1702,13 @@
             <a:prstDash val="solid"/>
           </a:ln>
         </p:spPr>
+        <p:txBody>
+          <a:bodyPr/>
+          <a:lstStyle/>
+          <a:p>
+            <a:endParaRPr lang="en-IN"/>
+          </a:p>
+        </p:txBody>
       </p:sp>
       <p:sp>
         <p:nvSpPr>
@@ -1642,6 +1734,13 @@
             <a:prstDash val="solid"/>
           </a:ln>
         </p:spPr>
+        <p:txBody>
+          <a:bodyPr/>
+          <a:lstStyle/>
+          <a:p>
+            <a:endParaRPr lang="en-IN"/>
+          </a:p>
+        </p:txBody>
       </p:sp>
       <p:sp>
         <p:nvSpPr>
@@ -1667,6 +1766,13 @@
             <a:prstDash val="solid"/>
           </a:ln>
         </p:spPr>
+        <p:txBody>
+          <a:bodyPr/>
+          <a:lstStyle/>
+          <a:p>
+            <a:endParaRPr lang="en-IN"/>
+          </a:p>
+        </p:txBody>
       </p:sp>
       <p:sp>
         <p:nvSpPr>
@@ -1888,6 +1994,1192 @@
 </file>
 
 <file path=ppt/slides/slide10.xml><?xml version="1.0" encoding="utf-8"?>
+<p:sld xmlns:a="http://schemas.openxmlformats.org/drawingml/2006/main" xmlns:r="http://schemas.openxmlformats.org/officeDocument/2006/relationships" xmlns:p="http://schemas.openxmlformats.org/presentationml/2006/main">
+  <p:cSld name="Slide 11">
+    <p:bg>
+      <p:bgPr>
+        <a:solidFill>
+          <a:srgbClr val="F4F8FC"/>
+        </a:solidFill>
+        <a:effectLst/>
+      </p:bgPr>
+    </p:bg>
+    <p:spTree>
+      <p:nvGrpSpPr>
+        <p:cNvPr id="1" name=""/>
+        <p:cNvGrpSpPr/>
+        <p:nvPr/>
+      </p:nvGrpSpPr>
+      <p:grpSpPr>
+        <a:xfrm>
+          <a:off x="0" y="0"/>
+          <a:ext cx="0" cy="0"/>
+          <a:chOff x="0" y="0"/>
+          <a:chExt cx="0" cy="0"/>
+        </a:xfrm>
+      </p:grpSpPr>
+      <p:sp>
+        <p:nvSpPr>
+          <p:cNvPr id="2" name="Shape 0"/>
+          <p:cNvSpPr/>
+          <p:nvPr/>
+        </p:nvSpPr>
+        <p:spPr>
+          <a:xfrm>
+            <a:off x="0" y="0"/>
+            <a:ext cx="9144000" cy="658368"/>
+          </a:xfrm>
+          <a:prstGeom prst="rect">
+            <a:avLst/>
+          </a:prstGeom>
+          <a:solidFill>
+            <a:srgbClr val="1B2A4A"/>
+          </a:solidFill>
+          <a:ln w="12700">
+            <a:solidFill>
+              <a:srgbClr val="1B2A4A"/>
+            </a:solidFill>
+            <a:prstDash val="solid"/>
+          </a:ln>
+        </p:spPr>
+        <p:txBody>
+          <a:bodyPr/>
+          <a:lstStyle/>
+          <a:p>
+            <a:endParaRPr lang="en-IN"/>
+          </a:p>
+        </p:txBody>
+      </p:sp>
+      <p:sp>
+        <p:nvSpPr>
+          <p:cNvPr id="3" name="Text 1"/>
+          <p:cNvSpPr/>
+          <p:nvPr/>
+        </p:nvSpPr>
+        <p:spPr>
+          <a:xfrm>
+            <a:off x="365760" y="0"/>
+            <a:ext cx="8412480" cy="658368"/>
+          </a:xfrm>
+          <a:prstGeom prst="rect">
+            <a:avLst/>
+          </a:prstGeom>
+          <a:noFill/>
+          <a:ln/>
+        </p:spPr>
+        <p:txBody>
+          <a:bodyPr wrap="square" rtlCol="0" anchor="ctr"/>
+          <a:lstStyle/>
+          <a:p>
+            <a:pPr marL="0" indent="0">
+              <a:buNone/>
+            </a:pPr>
+            <a:r>
+              <a:rPr lang="en-US" sz="2200" b="1" dirty="0">
+                <a:solidFill>
+                  <a:srgbClr val="FFFFFF"/>
+                </a:solidFill>
+                <a:latin typeface="Calibri" pitchFamily="34" charset="0"/>
+                <a:ea typeface="Calibri" pitchFamily="34" charset="-122"/>
+                <a:cs typeface="Calibri" pitchFamily="34" charset="-120"/>
+              </a:rPr>
+              <a:t>Key Packages Used</a:t>
+            </a:r>
+            <a:endParaRPr lang="en-US" sz="2200" dirty="0"/>
+          </a:p>
+        </p:txBody>
+      </p:sp>
+      <p:sp>
+        <p:nvSpPr>
+          <p:cNvPr id="4" name="Text 2"/>
+          <p:cNvSpPr/>
+          <p:nvPr/>
+        </p:nvSpPr>
+        <p:spPr>
+          <a:xfrm>
+            <a:off x="365760" y="749808"/>
+            <a:ext cx="8412480" cy="320040"/>
+          </a:xfrm>
+          <a:prstGeom prst="rect">
+            <a:avLst/>
+          </a:prstGeom>
+          <a:noFill/>
+          <a:ln/>
+        </p:spPr>
+        <p:txBody>
+          <a:bodyPr wrap="square" rtlCol="0" anchor="ctr"/>
+          <a:lstStyle/>
+          <a:p>
+            <a:pPr marL="0" indent="0">
+              <a:buNone/>
+            </a:pPr>
+            <a:r>
+              <a:rPr lang="en-US" sz="1300" dirty="0">
+                <a:solidFill>
+                  <a:srgbClr val="64748B"/>
+                </a:solidFill>
+                <a:latin typeface="Calibri" pitchFamily="34" charset="0"/>
+                <a:ea typeface="Calibri" pitchFamily="34" charset="-122"/>
+                <a:cs typeface="Calibri" pitchFamily="34" charset="-120"/>
+              </a:rPr>
+              <a:t>The main Python libraries and tools we are using:</a:t>
+            </a:r>
+            <a:endParaRPr lang="en-US" sz="1300" dirty="0"/>
+          </a:p>
+        </p:txBody>
+      </p:sp>
+      <p:sp>
+        <p:nvSpPr>
+          <p:cNvPr id="5" name="Shape 3"/>
+          <p:cNvSpPr/>
+          <p:nvPr/>
+        </p:nvSpPr>
+        <p:spPr>
+          <a:xfrm>
+            <a:off x="365760" y="1170432"/>
+            <a:ext cx="8412480" cy="384048"/>
+          </a:xfrm>
+          <a:prstGeom prst="rect">
+            <a:avLst/>
+          </a:prstGeom>
+          <a:solidFill>
+            <a:srgbClr val="1B2A4A"/>
+          </a:solidFill>
+          <a:ln w="12700">
+            <a:solidFill>
+              <a:srgbClr val="1B2A4A"/>
+            </a:solidFill>
+            <a:prstDash val="solid"/>
+          </a:ln>
+        </p:spPr>
+        <p:txBody>
+          <a:bodyPr/>
+          <a:lstStyle/>
+          <a:p>
+            <a:endParaRPr lang="en-IN"/>
+          </a:p>
+        </p:txBody>
+      </p:sp>
+      <p:sp>
+        <p:nvSpPr>
+          <p:cNvPr id="6" name="Text 4"/>
+          <p:cNvSpPr/>
+          <p:nvPr/>
+        </p:nvSpPr>
+        <p:spPr>
+          <a:xfrm>
+            <a:off x="457200" y="1170432"/>
+            <a:ext cx="1828800" cy="384048"/>
+          </a:xfrm>
+          <a:prstGeom prst="rect">
+            <a:avLst/>
+          </a:prstGeom>
+          <a:noFill/>
+          <a:ln/>
+        </p:spPr>
+        <p:txBody>
+          <a:bodyPr wrap="square" rtlCol="0" anchor="ctr"/>
+          <a:lstStyle/>
+          <a:p>
+            <a:pPr marL="0" indent="0">
+              <a:buNone/>
+            </a:pPr>
+            <a:r>
+              <a:rPr lang="en-US" sz="1200" b="1" dirty="0">
+                <a:solidFill>
+                  <a:srgbClr val="FFFFFF"/>
+                </a:solidFill>
+                <a:latin typeface="Calibri" pitchFamily="34" charset="0"/>
+                <a:ea typeface="Calibri" pitchFamily="34" charset="-122"/>
+                <a:cs typeface="Calibri" pitchFamily="34" charset="-120"/>
+              </a:rPr>
+              <a:t>Module</a:t>
+            </a:r>
+            <a:endParaRPr lang="en-US" sz="1200" dirty="0"/>
+          </a:p>
+        </p:txBody>
+      </p:sp>
+      <p:sp>
+        <p:nvSpPr>
+          <p:cNvPr id="7" name="Text 5"/>
+          <p:cNvSpPr/>
+          <p:nvPr/>
+        </p:nvSpPr>
+        <p:spPr>
+          <a:xfrm>
+            <a:off x="2377440" y="1170432"/>
+            <a:ext cx="2560320" cy="384048"/>
+          </a:xfrm>
+          <a:prstGeom prst="rect">
+            <a:avLst/>
+          </a:prstGeom>
+          <a:noFill/>
+          <a:ln/>
+        </p:spPr>
+        <p:txBody>
+          <a:bodyPr wrap="square" rtlCol="0" anchor="ctr"/>
+          <a:lstStyle/>
+          <a:p>
+            <a:pPr marL="0" indent="0">
+              <a:buNone/>
+            </a:pPr>
+            <a:r>
+              <a:rPr lang="en-US" sz="1200" b="1" dirty="0">
+                <a:solidFill>
+                  <a:srgbClr val="FFFFFF"/>
+                </a:solidFill>
+                <a:latin typeface="Calibri" pitchFamily="34" charset="0"/>
+                <a:ea typeface="Calibri" pitchFamily="34" charset="-122"/>
+                <a:cs typeface="Calibri" pitchFamily="34" charset="-120"/>
+              </a:rPr>
+              <a:t>Used For</a:t>
+            </a:r>
+            <a:endParaRPr lang="en-US" sz="1200" dirty="0"/>
+          </a:p>
+        </p:txBody>
+      </p:sp>
+      <p:sp>
+        <p:nvSpPr>
+          <p:cNvPr id="8" name="Text 6"/>
+          <p:cNvSpPr/>
+          <p:nvPr/>
+        </p:nvSpPr>
+        <p:spPr>
+          <a:xfrm>
+            <a:off x="5029200" y="1170432"/>
+            <a:ext cx="3657600" cy="384048"/>
+          </a:xfrm>
+          <a:prstGeom prst="rect">
+            <a:avLst/>
+          </a:prstGeom>
+          <a:noFill/>
+          <a:ln/>
+        </p:spPr>
+        <p:txBody>
+          <a:bodyPr wrap="square" rtlCol="0" anchor="ctr"/>
+          <a:lstStyle/>
+          <a:p>
+            <a:pPr marL="0" indent="0">
+              <a:buNone/>
+            </a:pPr>
+            <a:r>
+              <a:rPr lang="en-US" sz="1200" b="1" dirty="0">
+                <a:solidFill>
+                  <a:srgbClr val="FFFFFF"/>
+                </a:solidFill>
+                <a:latin typeface="Calibri" pitchFamily="34" charset="0"/>
+                <a:ea typeface="Calibri" pitchFamily="34" charset="-122"/>
+                <a:cs typeface="Calibri" pitchFamily="34" charset="-120"/>
+              </a:rPr>
+              <a:t>What It Does in Our Project</a:t>
+            </a:r>
+            <a:endParaRPr lang="en-US" sz="1200" dirty="0"/>
+          </a:p>
+        </p:txBody>
+      </p:sp>
+      <p:sp>
+        <p:nvSpPr>
+          <p:cNvPr id="9" name="Shape 7"/>
+          <p:cNvSpPr/>
+          <p:nvPr/>
+        </p:nvSpPr>
+        <p:spPr>
+          <a:xfrm>
+            <a:off x="365760" y="1572768"/>
+            <a:ext cx="8412480" cy="548640"/>
+          </a:xfrm>
+          <a:prstGeom prst="rect">
+            <a:avLst/>
+          </a:prstGeom>
+          <a:solidFill>
+            <a:srgbClr val="FFFFFF"/>
+          </a:solidFill>
+          <a:ln w="12700">
+            <a:solidFill>
+              <a:srgbClr val="E2E8F0"/>
+            </a:solidFill>
+            <a:prstDash val="solid"/>
+          </a:ln>
+        </p:spPr>
+        <p:txBody>
+          <a:bodyPr/>
+          <a:lstStyle/>
+          <a:p>
+            <a:endParaRPr lang="en-IN"/>
+          </a:p>
+        </p:txBody>
+      </p:sp>
+      <p:sp>
+        <p:nvSpPr>
+          <p:cNvPr id="10" name="Text 8"/>
+          <p:cNvSpPr/>
+          <p:nvPr/>
+        </p:nvSpPr>
+        <p:spPr>
+          <a:xfrm>
+            <a:off x="457200" y="1572768"/>
+            <a:ext cx="1828800" cy="548640"/>
+          </a:xfrm>
+          <a:prstGeom prst="rect">
+            <a:avLst/>
+          </a:prstGeom>
+          <a:noFill/>
+          <a:ln/>
+        </p:spPr>
+        <p:txBody>
+          <a:bodyPr wrap="square" rtlCol="0" anchor="ctr"/>
+          <a:lstStyle/>
+          <a:p>
+            <a:pPr marL="0" indent="0">
+              <a:buNone/>
+            </a:pPr>
+            <a:r>
+              <a:rPr lang="en-US" sz="1200" b="1" dirty="0">
+                <a:solidFill>
+                  <a:srgbClr val="2E75B6"/>
+                </a:solidFill>
+                <a:latin typeface="Calibri" pitchFamily="34" charset="0"/>
+                <a:ea typeface="Calibri" pitchFamily="34" charset="-122"/>
+                <a:cs typeface="Calibri" pitchFamily="34" charset="-120"/>
+              </a:rPr>
+              <a:t>OpenCV</a:t>
+            </a:r>
+            <a:endParaRPr lang="en-US" sz="1200" dirty="0"/>
+          </a:p>
+        </p:txBody>
+      </p:sp>
+      <p:sp>
+        <p:nvSpPr>
+          <p:cNvPr id="11" name="Text 9"/>
+          <p:cNvSpPr/>
+          <p:nvPr/>
+        </p:nvSpPr>
+        <p:spPr>
+          <a:xfrm>
+            <a:off x="2377440" y="1572768"/>
+            <a:ext cx="2560320" cy="548640"/>
+          </a:xfrm>
+          <a:prstGeom prst="rect">
+            <a:avLst/>
+          </a:prstGeom>
+          <a:noFill/>
+          <a:ln/>
+        </p:spPr>
+        <p:txBody>
+          <a:bodyPr wrap="square" rtlCol="0" anchor="ctr"/>
+          <a:lstStyle/>
+          <a:p>
+            <a:pPr marL="0" indent="0">
+              <a:buNone/>
+            </a:pPr>
+            <a:r>
+              <a:rPr lang="en-US" sz="1100" dirty="0">
+                <a:solidFill>
+                  <a:srgbClr val="1B2A4A"/>
+                </a:solidFill>
+                <a:latin typeface="Calibri" pitchFamily="34" charset="0"/>
+                <a:ea typeface="Calibri" pitchFamily="34" charset="-122"/>
+                <a:cs typeface="Calibri" pitchFamily="34" charset="-120"/>
+              </a:rPr>
+              <a:t>Camera input &amp; image processing</a:t>
+            </a:r>
+            <a:endParaRPr lang="en-US" sz="1100" dirty="0"/>
+          </a:p>
+        </p:txBody>
+      </p:sp>
+      <p:sp>
+        <p:nvSpPr>
+          <p:cNvPr id="12" name="Text 10"/>
+          <p:cNvSpPr/>
+          <p:nvPr/>
+        </p:nvSpPr>
+        <p:spPr>
+          <a:xfrm>
+            <a:off x="5029200" y="1572768"/>
+            <a:ext cx="3657600" cy="548640"/>
+          </a:xfrm>
+          <a:prstGeom prst="rect">
+            <a:avLst/>
+          </a:prstGeom>
+          <a:noFill/>
+          <a:ln/>
+        </p:spPr>
+        <p:txBody>
+          <a:bodyPr wrap="square" rtlCol="0" anchor="ctr"/>
+          <a:lstStyle/>
+          <a:p>
+            <a:pPr marL="0" indent="0">
+              <a:buNone/>
+            </a:pPr>
+            <a:r>
+              <a:rPr lang="en-US" sz="1000" dirty="0">
+                <a:solidFill>
+                  <a:srgbClr val="64748B"/>
+                </a:solidFill>
+                <a:latin typeface="Calibri" pitchFamily="34" charset="0"/>
+                <a:ea typeface="Calibri" pitchFamily="34" charset="-122"/>
+                <a:cs typeface="Calibri" pitchFamily="34" charset="-120"/>
+              </a:rPr>
+              <a:t>Reads live video frames from the camera, crops the plate region</a:t>
+            </a:r>
+            <a:endParaRPr lang="en-US" sz="1000" dirty="0"/>
+          </a:p>
+        </p:txBody>
+      </p:sp>
+      <p:sp>
+        <p:nvSpPr>
+          <p:cNvPr id="13" name="Shape 11"/>
+          <p:cNvSpPr/>
+          <p:nvPr/>
+        </p:nvSpPr>
+        <p:spPr>
+          <a:xfrm>
+            <a:off x="365760" y="2139696"/>
+            <a:ext cx="8412480" cy="548640"/>
+          </a:xfrm>
+          <a:prstGeom prst="rect">
+            <a:avLst/>
+          </a:prstGeom>
+          <a:solidFill>
+            <a:srgbClr val="F4F8FC"/>
+          </a:solidFill>
+          <a:ln w="12700">
+            <a:solidFill>
+              <a:srgbClr val="E2E8F0"/>
+            </a:solidFill>
+            <a:prstDash val="solid"/>
+          </a:ln>
+        </p:spPr>
+        <p:txBody>
+          <a:bodyPr/>
+          <a:lstStyle/>
+          <a:p>
+            <a:endParaRPr lang="en-IN"/>
+          </a:p>
+        </p:txBody>
+      </p:sp>
+      <p:sp>
+        <p:nvSpPr>
+          <p:cNvPr id="14" name="Text 12"/>
+          <p:cNvSpPr/>
+          <p:nvPr/>
+        </p:nvSpPr>
+        <p:spPr>
+          <a:xfrm>
+            <a:off x="457200" y="2139696"/>
+            <a:ext cx="1828800" cy="548640"/>
+          </a:xfrm>
+          <a:prstGeom prst="rect">
+            <a:avLst/>
+          </a:prstGeom>
+          <a:noFill/>
+          <a:ln/>
+        </p:spPr>
+        <p:txBody>
+          <a:bodyPr wrap="square" rtlCol="0" anchor="ctr"/>
+          <a:lstStyle/>
+          <a:p>
+            <a:pPr marL="0" indent="0">
+              <a:buNone/>
+            </a:pPr>
+            <a:r>
+              <a:rPr lang="en-US" sz="1200" b="1" dirty="0">
+                <a:solidFill>
+                  <a:srgbClr val="2E75B6"/>
+                </a:solidFill>
+                <a:latin typeface="Calibri" pitchFamily="34" charset="0"/>
+                <a:ea typeface="Calibri" pitchFamily="34" charset="-122"/>
+                <a:cs typeface="Calibri" pitchFamily="34" charset="-120"/>
+              </a:rPr>
+              <a:t>YOLOv8</a:t>
+            </a:r>
+            <a:endParaRPr lang="en-US" sz="1200" dirty="0"/>
+          </a:p>
+        </p:txBody>
+      </p:sp>
+      <p:sp>
+        <p:nvSpPr>
+          <p:cNvPr id="15" name="Text 13"/>
+          <p:cNvSpPr/>
+          <p:nvPr/>
+        </p:nvSpPr>
+        <p:spPr>
+          <a:xfrm>
+            <a:off x="2377440" y="2139696"/>
+            <a:ext cx="2560320" cy="548640"/>
+          </a:xfrm>
+          <a:prstGeom prst="rect">
+            <a:avLst/>
+          </a:prstGeom>
+          <a:noFill/>
+          <a:ln/>
+        </p:spPr>
+        <p:txBody>
+          <a:bodyPr wrap="square" rtlCol="0" anchor="ctr"/>
+          <a:lstStyle/>
+          <a:p>
+            <a:pPr marL="0" indent="0">
+              <a:buNone/>
+            </a:pPr>
+            <a:r>
+              <a:rPr lang="en-US" sz="1100" dirty="0">
+                <a:solidFill>
+                  <a:srgbClr val="1B2A4A"/>
+                </a:solidFill>
+                <a:latin typeface="Calibri" pitchFamily="34" charset="0"/>
+                <a:ea typeface="Calibri" pitchFamily="34" charset="-122"/>
+                <a:cs typeface="Calibri" pitchFamily="34" charset="-120"/>
+              </a:rPr>
+              <a:t>Object / plate detection</a:t>
+            </a:r>
+            <a:endParaRPr lang="en-US" sz="1100" dirty="0"/>
+          </a:p>
+        </p:txBody>
+      </p:sp>
+      <p:sp>
+        <p:nvSpPr>
+          <p:cNvPr id="16" name="Text 14"/>
+          <p:cNvSpPr/>
+          <p:nvPr/>
+        </p:nvSpPr>
+        <p:spPr>
+          <a:xfrm>
+            <a:off x="5029200" y="2139696"/>
+            <a:ext cx="3657600" cy="548640"/>
+          </a:xfrm>
+          <a:prstGeom prst="rect">
+            <a:avLst/>
+          </a:prstGeom>
+          <a:noFill/>
+          <a:ln/>
+        </p:spPr>
+        <p:txBody>
+          <a:bodyPr wrap="square" rtlCol="0" anchor="ctr"/>
+          <a:lstStyle/>
+          <a:p>
+            <a:pPr marL="0" indent="0">
+              <a:buNone/>
+            </a:pPr>
+            <a:r>
+              <a:rPr lang="en-US" sz="1000" dirty="0">
+                <a:solidFill>
+                  <a:srgbClr val="64748B"/>
+                </a:solidFill>
+                <a:latin typeface="Calibri" pitchFamily="34" charset="0"/>
+                <a:ea typeface="Calibri" pitchFamily="34" charset="-122"/>
+                <a:cs typeface="Calibri" pitchFamily="34" charset="-120"/>
+              </a:rPr>
+              <a:t>Finds where the number plate is inside the image</a:t>
+            </a:r>
+            <a:endParaRPr lang="en-US" sz="1000" dirty="0"/>
+          </a:p>
+        </p:txBody>
+      </p:sp>
+      <p:sp>
+        <p:nvSpPr>
+          <p:cNvPr id="17" name="Shape 15"/>
+          <p:cNvSpPr/>
+          <p:nvPr/>
+        </p:nvSpPr>
+        <p:spPr>
+          <a:xfrm>
+            <a:off x="365760" y="2706624"/>
+            <a:ext cx="8412480" cy="548640"/>
+          </a:xfrm>
+          <a:prstGeom prst="rect">
+            <a:avLst/>
+          </a:prstGeom>
+          <a:solidFill>
+            <a:srgbClr val="FFFFFF"/>
+          </a:solidFill>
+          <a:ln w="12700">
+            <a:solidFill>
+              <a:srgbClr val="E2E8F0"/>
+            </a:solidFill>
+            <a:prstDash val="solid"/>
+          </a:ln>
+        </p:spPr>
+        <p:txBody>
+          <a:bodyPr/>
+          <a:lstStyle/>
+          <a:p>
+            <a:endParaRPr lang="en-IN"/>
+          </a:p>
+        </p:txBody>
+      </p:sp>
+      <p:sp>
+        <p:nvSpPr>
+          <p:cNvPr id="18" name="Text 16"/>
+          <p:cNvSpPr/>
+          <p:nvPr/>
+        </p:nvSpPr>
+        <p:spPr>
+          <a:xfrm>
+            <a:off x="457200" y="2706624"/>
+            <a:ext cx="1828800" cy="548640"/>
+          </a:xfrm>
+          <a:prstGeom prst="rect">
+            <a:avLst/>
+          </a:prstGeom>
+          <a:noFill/>
+          <a:ln/>
+        </p:spPr>
+        <p:txBody>
+          <a:bodyPr wrap="square" rtlCol="0" anchor="ctr"/>
+          <a:lstStyle/>
+          <a:p>
+            <a:pPr marL="0" indent="0">
+              <a:buNone/>
+            </a:pPr>
+            <a:r>
+              <a:rPr lang="en-US" sz="1200" b="1" dirty="0">
+                <a:solidFill>
+                  <a:srgbClr val="2E75B6"/>
+                </a:solidFill>
+                <a:latin typeface="Calibri" pitchFamily="34" charset="0"/>
+                <a:ea typeface="Calibri" pitchFamily="34" charset="-122"/>
+                <a:cs typeface="Calibri" pitchFamily="34" charset="-120"/>
+              </a:rPr>
+              <a:t>Tesseract / EasyOCR</a:t>
+            </a:r>
+            <a:endParaRPr lang="en-US" sz="1200" dirty="0"/>
+          </a:p>
+        </p:txBody>
+      </p:sp>
+      <p:sp>
+        <p:nvSpPr>
+          <p:cNvPr id="19" name="Text 17"/>
+          <p:cNvSpPr/>
+          <p:nvPr/>
+        </p:nvSpPr>
+        <p:spPr>
+          <a:xfrm>
+            <a:off x="2377440" y="2706624"/>
+            <a:ext cx="2560320" cy="548640"/>
+          </a:xfrm>
+          <a:prstGeom prst="rect">
+            <a:avLst/>
+          </a:prstGeom>
+          <a:noFill/>
+          <a:ln/>
+        </p:spPr>
+        <p:txBody>
+          <a:bodyPr wrap="square" rtlCol="0" anchor="ctr"/>
+          <a:lstStyle/>
+          <a:p>
+            <a:pPr marL="0" indent="0">
+              <a:buNone/>
+            </a:pPr>
+            <a:r>
+              <a:rPr lang="en-US" sz="1100" dirty="0">
+                <a:solidFill>
+                  <a:srgbClr val="1B2A4A"/>
+                </a:solidFill>
+                <a:latin typeface="Calibri" pitchFamily="34" charset="0"/>
+                <a:ea typeface="Calibri" pitchFamily="34" charset="-122"/>
+                <a:cs typeface="Calibri" pitchFamily="34" charset="-120"/>
+              </a:rPr>
+              <a:t>Text recognition</a:t>
+            </a:r>
+            <a:endParaRPr lang="en-US" sz="1100" dirty="0"/>
+          </a:p>
+        </p:txBody>
+      </p:sp>
+      <p:sp>
+        <p:nvSpPr>
+          <p:cNvPr id="20" name="Text 18"/>
+          <p:cNvSpPr/>
+          <p:nvPr/>
+        </p:nvSpPr>
+        <p:spPr>
+          <a:xfrm>
+            <a:off x="5029200" y="2706624"/>
+            <a:ext cx="3657600" cy="548640"/>
+          </a:xfrm>
+          <a:prstGeom prst="rect">
+            <a:avLst/>
+          </a:prstGeom>
+          <a:noFill/>
+          <a:ln/>
+        </p:spPr>
+        <p:txBody>
+          <a:bodyPr wrap="square" rtlCol="0" anchor="ctr"/>
+          <a:lstStyle/>
+          <a:p>
+            <a:pPr marL="0" indent="0">
+              <a:buNone/>
+            </a:pPr>
+            <a:r>
+              <a:rPr lang="en-US" sz="1000" dirty="0">
+                <a:solidFill>
+                  <a:srgbClr val="64748B"/>
+                </a:solidFill>
+                <a:latin typeface="Calibri" pitchFamily="34" charset="0"/>
+                <a:ea typeface="Calibri" pitchFamily="34" charset="-122"/>
+                <a:cs typeface="Calibri" pitchFamily="34" charset="-120"/>
+              </a:rPr>
+              <a:t>Reads the actual plate characters from the cropped image</a:t>
+            </a:r>
+            <a:endParaRPr lang="en-US" sz="1000" dirty="0"/>
+          </a:p>
+        </p:txBody>
+      </p:sp>
+      <p:sp>
+        <p:nvSpPr>
+          <p:cNvPr id="21" name="Shape 19"/>
+          <p:cNvSpPr/>
+          <p:nvPr/>
+        </p:nvSpPr>
+        <p:spPr>
+          <a:xfrm>
+            <a:off x="365760" y="3273552"/>
+            <a:ext cx="8412480" cy="548640"/>
+          </a:xfrm>
+          <a:prstGeom prst="rect">
+            <a:avLst/>
+          </a:prstGeom>
+          <a:solidFill>
+            <a:srgbClr val="F4F8FC"/>
+          </a:solidFill>
+          <a:ln w="12700">
+            <a:solidFill>
+              <a:srgbClr val="E2E8F0"/>
+            </a:solidFill>
+            <a:prstDash val="solid"/>
+          </a:ln>
+        </p:spPr>
+        <p:txBody>
+          <a:bodyPr/>
+          <a:lstStyle/>
+          <a:p>
+            <a:endParaRPr lang="en-IN"/>
+          </a:p>
+        </p:txBody>
+      </p:sp>
+      <p:sp>
+        <p:nvSpPr>
+          <p:cNvPr id="22" name="Text 20"/>
+          <p:cNvSpPr/>
+          <p:nvPr/>
+        </p:nvSpPr>
+        <p:spPr>
+          <a:xfrm>
+            <a:off x="457200" y="3273552"/>
+            <a:ext cx="1828800" cy="548640"/>
+          </a:xfrm>
+          <a:prstGeom prst="rect">
+            <a:avLst/>
+          </a:prstGeom>
+          <a:noFill/>
+          <a:ln/>
+        </p:spPr>
+        <p:txBody>
+          <a:bodyPr wrap="square" rtlCol="0" anchor="ctr"/>
+          <a:lstStyle/>
+          <a:p>
+            <a:pPr marL="0" indent="0">
+              <a:buNone/>
+            </a:pPr>
+            <a:r>
+              <a:rPr lang="en-US" sz="1200" b="1" dirty="0">
+                <a:solidFill>
+                  <a:srgbClr val="2E75B6"/>
+                </a:solidFill>
+                <a:latin typeface="Calibri" pitchFamily="34" charset="0"/>
+                <a:ea typeface="Calibri" pitchFamily="34" charset="-122"/>
+                <a:cs typeface="Calibri" pitchFamily="34" charset="-120"/>
+              </a:rPr>
+              <a:t>Django</a:t>
+            </a:r>
+            <a:endParaRPr lang="en-US" sz="1200" dirty="0"/>
+          </a:p>
+        </p:txBody>
+      </p:sp>
+      <p:sp>
+        <p:nvSpPr>
+          <p:cNvPr id="23" name="Text 21"/>
+          <p:cNvSpPr/>
+          <p:nvPr/>
+        </p:nvSpPr>
+        <p:spPr>
+          <a:xfrm>
+            <a:off x="2377440" y="3273552"/>
+            <a:ext cx="2560320" cy="548640"/>
+          </a:xfrm>
+          <a:prstGeom prst="rect">
+            <a:avLst/>
+          </a:prstGeom>
+          <a:noFill/>
+          <a:ln/>
+        </p:spPr>
+        <p:txBody>
+          <a:bodyPr wrap="square" rtlCol="0" anchor="ctr"/>
+          <a:lstStyle/>
+          <a:p>
+            <a:pPr marL="0" indent="0">
+              <a:buNone/>
+            </a:pPr>
+            <a:r>
+              <a:rPr lang="en-US" sz="1100" dirty="0">
+                <a:solidFill>
+                  <a:srgbClr val="1B2A4A"/>
+                </a:solidFill>
+                <a:latin typeface="Calibri" pitchFamily="34" charset="0"/>
+                <a:ea typeface="Calibri" pitchFamily="34" charset="-122"/>
+                <a:cs typeface="Calibri" pitchFamily="34" charset="-120"/>
+              </a:rPr>
+              <a:t>Web server / API</a:t>
+            </a:r>
+            <a:endParaRPr lang="en-US" sz="1100" dirty="0"/>
+          </a:p>
+        </p:txBody>
+      </p:sp>
+      <p:sp>
+        <p:nvSpPr>
+          <p:cNvPr id="24" name="Text 22"/>
+          <p:cNvSpPr/>
+          <p:nvPr/>
+        </p:nvSpPr>
+        <p:spPr>
+          <a:xfrm>
+            <a:off x="5029200" y="3273552"/>
+            <a:ext cx="3657600" cy="548640"/>
+          </a:xfrm>
+          <a:prstGeom prst="rect">
+            <a:avLst/>
+          </a:prstGeom>
+          <a:noFill/>
+          <a:ln/>
+        </p:spPr>
+        <p:txBody>
+          <a:bodyPr wrap="square" rtlCol="0" anchor="ctr"/>
+          <a:lstStyle/>
+          <a:p>
+            <a:pPr marL="0" indent="0">
+              <a:buNone/>
+            </a:pPr>
+            <a:r>
+              <a:rPr lang="en-US" sz="1000" dirty="0">
+                <a:solidFill>
+                  <a:srgbClr val="64748B"/>
+                </a:solidFill>
+                <a:latin typeface="Calibri" pitchFamily="34" charset="0"/>
+                <a:ea typeface="Calibri" pitchFamily="34" charset="-122"/>
+                <a:cs typeface="Calibri" pitchFamily="34" charset="-120"/>
+              </a:rPr>
+              <a:t>Handles requests from the camera, gate, and website</a:t>
+            </a:r>
+            <a:endParaRPr lang="en-US" sz="1000" dirty="0"/>
+          </a:p>
+        </p:txBody>
+      </p:sp>
+      <p:sp>
+        <p:nvSpPr>
+          <p:cNvPr id="25" name="Shape 23"/>
+          <p:cNvSpPr/>
+          <p:nvPr/>
+        </p:nvSpPr>
+        <p:spPr>
+          <a:xfrm>
+            <a:off x="365760" y="3840480"/>
+            <a:ext cx="8412480" cy="548640"/>
+          </a:xfrm>
+          <a:prstGeom prst="rect">
+            <a:avLst/>
+          </a:prstGeom>
+          <a:solidFill>
+            <a:srgbClr val="FFFFFF"/>
+          </a:solidFill>
+          <a:ln w="12700">
+            <a:solidFill>
+              <a:srgbClr val="E2E8F0"/>
+            </a:solidFill>
+            <a:prstDash val="solid"/>
+          </a:ln>
+        </p:spPr>
+        <p:txBody>
+          <a:bodyPr/>
+          <a:lstStyle/>
+          <a:p>
+            <a:endParaRPr lang="en-IN"/>
+          </a:p>
+        </p:txBody>
+      </p:sp>
+      <p:sp>
+        <p:nvSpPr>
+          <p:cNvPr id="26" name="Text 24"/>
+          <p:cNvSpPr/>
+          <p:nvPr/>
+        </p:nvSpPr>
+        <p:spPr>
+          <a:xfrm>
+            <a:off x="457200" y="3840480"/>
+            <a:ext cx="1828800" cy="548640"/>
+          </a:xfrm>
+          <a:prstGeom prst="rect">
+            <a:avLst/>
+          </a:prstGeom>
+          <a:noFill/>
+          <a:ln/>
+        </p:spPr>
+        <p:txBody>
+          <a:bodyPr wrap="square" rtlCol="0" anchor="ctr"/>
+          <a:lstStyle/>
+          <a:p>
+            <a:pPr marL="0" indent="0">
+              <a:buNone/>
+            </a:pPr>
+            <a:r>
+              <a:rPr lang="en-US" sz="1200" b="1" dirty="0">
+                <a:solidFill>
+                  <a:srgbClr val="2E75B6"/>
+                </a:solidFill>
+                <a:latin typeface="Calibri" pitchFamily="34" charset="0"/>
+                <a:ea typeface="Calibri" pitchFamily="34" charset="-122"/>
+                <a:cs typeface="Calibri" pitchFamily="34" charset="-120"/>
+              </a:rPr>
+              <a:t>SQLite / MySQL</a:t>
+            </a:r>
+            <a:endParaRPr lang="en-US" sz="1200" dirty="0"/>
+          </a:p>
+        </p:txBody>
+      </p:sp>
+      <p:sp>
+        <p:nvSpPr>
+          <p:cNvPr id="27" name="Text 25"/>
+          <p:cNvSpPr/>
+          <p:nvPr/>
+        </p:nvSpPr>
+        <p:spPr>
+          <a:xfrm>
+            <a:off x="2377440" y="3840480"/>
+            <a:ext cx="2560320" cy="548640"/>
+          </a:xfrm>
+          <a:prstGeom prst="rect">
+            <a:avLst/>
+          </a:prstGeom>
+          <a:noFill/>
+          <a:ln/>
+        </p:spPr>
+        <p:txBody>
+          <a:bodyPr wrap="square" rtlCol="0" anchor="ctr"/>
+          <a:lstStyle/>
+          <a:p>
+            <a:pPr marL="0" indent="0">
+              <a:buNone/>
+            </a:pPr>
+            <a:r>
+              <a:rPr lang="en-US" sz="1100" dirty="0">
+                <a:solidFill>
+                  <a:srgbClr val="1B2A4A"/>
+                </a:solidFill>
+                <a:latin typeface="Calibri" pitchFamily="34" charset="0"/>
+                <a:ea typeface="Calibri" pitchFamily="34" charset="-122"/>
+                <a:cs typeface="Calibri" pitchFamily="34" charset="-120"/>
+              </a:rPr>
+              <a:t>Database</a:t>
+            </a:r>
+            <a:endParaRPr lang="en-US" sz="1100" dirty="0"/>
+          </a:p>
+        </p:txBody>
+      </p:sp>
+      <p:sp>
+        <p:nvSpPr>
+          <p:cNvPr id="28" name="Text 26"/>
+          <p:cNvSpPr/>
+          <p:nvPr/>
+        </p:nvSpPr>
+        <p:spPr>
+          <a:xfrm>
+            <a:off x="5029200" y="3840480"/>
+            <a:ext cx="3657600" cy="548640"/>
+          </a:xfrm>
+          <a:prstGeom prst="rect">
+            <a:avLst/>
+          </a:prstGeom>
+          <a:noFill/>
+          <a:ln/>
+        </p:spPr>
+        <p:txBody>
+          <a:bodyPr wrap="square" rtlCol="0" anchor="ctr"/>
+          <a:lstStyle/>
+          <a:p>
+            <a:pPr marL="0" indent="0">
+              <a:buNone/>
+            </a:pPr>
+            <a:r>
+              <a:rPr lang="en-US" sz="1000" dirty="0">
+                <a:solidFill>
+                  <a:srgbClr val="64748B"/>
+                </a:solidFill>
+                <a:latin typeface="Calibri" pitchFamily="34" charset="0"/>
+                <a:ea typeface="Calibri" pitchFamily="34" charset="-122"/>
+                <a:cs typeface="Calibri" pitchFamily="34" charset="-120"/>
+              </a:rPr>
+              <a:t>Stores users, slots, and all entry/exit records</a:t>
+            </a:r>
+            <a:endParaRPr lang="en-US" sz="1000" dirty="0"/>
+          </a:p>
+        </p:txBody>
+      </p:sp>
+      <p:sp>
+        <p:nvSpPr>
+          <p:cNvPr id="29" name="Shape 27"/>
+          <p:cNvSpPr/>
+          <p:nvPr/>
+        </p:nvSpPr>
+        <p:spPr>
+          <a:xfrm>
+            <a:off x="365760" y="4407408"/>
+            <a:ext cx="8412480" cy="548640"/>
+          </a:xfrm>
+          <a:prstGeom prst="rect">
+            <a:avLst/>
+          </a:prstGeom>
+          <a:solidFill>
+            <a:srgbClr val="F4F8FC"/>
+          </a:solidFill>
+          <a:ln w="12700">
+            <a:solidFill>
+              <a:srgbClr val="E2E8F0"/>
+            </a:solidFill>
+            <a:prstDash val="solid"/>
+          </a:ln>
+        </p:spPr>
+        <p:txBody>
+          <a:bodyPr/>
+          <a:lstStyle/>
+          <a:p>
+            <a:endParaRPr lang="en-IN"/>
+          </a:p>
+        </p:txBody>
+      </p:sp>
+      <p:sp>
+        <p:nvSpPr>
+          <p:cNvPr id="30" name="Text 28"/>
+          <p:cNvSpPr/>
+          <p:nvPr/>
+        </p:nvSpPr>
+        <p:spPr>
+          <a:xfrm>
+            <a:off x="457200" y="4407408"/>
+            <a:ext cx="1828800" cy="548640"/>
+          </a:xfrm>
+          <a:prstGeom prst="rect">
+            <a:avLst/>
+          </a:prstGeom>
+          <a:noFill/>
+          <a:ln/>
+        </p:spPr>
+        <p:txBody>
+          <a:bodyPr wrap="square" rtlCol="0" anchor="ctr"/>
+          <a:lstStyle/>
+          <a:p>
+            <a:pPr marL="0" indent="0">
+              <a:buNone/>
+            </a:pPr>
+            <a:r>
+              <a:rPr lang="en-US" sz="1200" b="1" dirty="0">
+                <a:solidFill>
+                  <a:srgbClr val="2E75B6"/>
+                </a:solidFill>
+                <a:latin typeface="Calibri" pitchFamily="34" charset="0"/>
+                <a:ea typeface="Calibri" pitchFamily="34" charset="-122"/>
+                <a:cs typeface="Calibri" pitchFamily="34" charset="-120"/>
+              </a:rPr>
+              <a:t>HTML/CSS/JS</a:t>
+            </a:r>
+            <a:endParaRPr lang="en-US" sz="1200" dirty="0"/>
+          </a:p>
+        </p:txBody>
+      </p:sp>
+      <p:sp>
+        <p:nvSpPr>
+          <p:cNvPr id="31" name="Text 29"/>
+          <p:cNvSpPr/>
+          <p:nvPr/>
+        </p:nvSpPr>
+        <p:spPr>
+          <a:xfrm>
+            <a:off x="2377440" y="4407408"/>
+            <a:ext cx="2560320" cy="548640"/>
+          </a:xfrm>
+          <a:prstGeom prst="rect">
+            <a:avLst/>
+          </a:prstGeom>
+          <a:noFill/>
+          <a:ln/>
+        </p:spPr>
+        <p:txBody>
+          <a:bodyPr wrap="square" rtlCol="0" anchor="ctr"/>
+          <a:lstStyle/>
+          <a:p>
+            <a:pPr marL="0" indent="0">
+              <a:buNone/>
+            </a:pPr>
+            <a:r>
+              <a:rPr lang="en-US" sz="1100" dirty="0">
+                <a:solidFill>
+                  <a:srgbClr val="1B2A4A"/>
+                </a:solidFill>
+                <a:latin typeface="Calibri" pitchFamily="34" charset="0"/>
+                <a:ea typeface="Calibri" pitchFamily="34" charset="-122"/>
+                <a:cs typeface="Calibri" pitchFamily="34" charset="-120"/>
+              </a:rPr>
+              <a:t>Website(Frontend)</a:t>
+            </a:r>
+            <a:endParaRPr lang="en-US" sz="1100" dirty="0"/>
+          </a:p>
+        </p:txBody>
+      </p:sp>
+      <p:sp>
+        <p:nvSpPr>
+          <p:cNvPr id="32" name="Text 30"/>
+          <p:cNvSpPr/>
+          <p:nvPr/>
+        </p:nvSpPr>
+        <p:spPr>
+          <a:xfrm>
+            <a:off x="5029200" y="4407408"/>
+            <a:ext cx="3657600" cy="548640"/>
+          </a:xfrm>
+          <a:prstGeom prst="rect">
+            <a:avLst/>
+          </a:prstGeom>
+          <a:noFill/>
+          <a:ln/>
+        </p:spPr>
+        <p:txBody>
+          <a:bodyPr wrap="square" rtlCol="0" anchor="ctr"/>
+          <a:lstStyle/>
+          <a:p>
+            <a:pPr marL="0" indent="0">
+              <a:buNone/>
+            </a:pPr>
+            <a:r>
+              <a:rPr lang="en-US" sz="1000" dirty="0">
+                <a:solidFill>
+                  <a:srgbClr val="64748B"/>
+                </a:solidFill>
+                <a:latin typeface="Calibri" pitchFamily="34" charset="0"/>
+                <a:ea typeface="Calibri" pitchFamily="34" charset="-122"/>
+                <a:cs typeface="Calibri" pitchFamily="34" charset="-120"/>
+              </a:rPr>
+              <a:t>User-facing website for registration and payment</a:t>
+            </a:r>
+            <a:endParaRPr lang="en-US" sz="1000" dirty="0"/>
+          </a:p>
+        </p:txBody>
+      </p:sp>
+    </p:spTree>
+  </p:cSld>
+  <p:clrMapOvr>
+    <a:masterClrMapping/>
+  </p:clrMapOvr>
+</p:sld>
+</file>
+
+<file path=ppt/slides/slide11.xml><?xml version="1.0" encoding="utf-8"?>
 <p:sld xmlns:a="http://schemas.openxmlformats.org/drawingml/2006/main" xmlns:r="http://schemas.openxmlformats.org/officeDocument/2006/relationships" xmlns:p="http://schemas.openxmlformats.org/presentationml/2006/main">
   <p:cSld name="Slide 9">
     <p:bg>
@@ -1936,6 +3228,13 @@
             <a:prstDash val="solid"/>
           </a:ln>
         </p:spPr>
+        <p:txBody>
+          <a:bodyPr/>
+          <a:lstStyle/>
+          <a:p>
+            <a:endParaRPr lang="en-IN"/>
+          </a:p>
+        </p:txBody>
       </p:sp>
       <p:sp>
         <p:nvSpPr>
@@ -2046,6 +3345,13 @@
             </a:outerShdw>
           </a:effectLst>
         </p:spPr>
+        <p:txBody>
+          <a:bodyPr/>
+          <a:lstStyle/>
+          <a:p>
+            <a:endParaRPr lang="en-IN"/>
+          </a:p>
+        </p:txBody>
       </p:sp>
       <p:sp>
         <p:nvSpPr>
@@ -2107,6 +3413,13 @@
             <a:prstDash val="solid"/>
           </a:ln>
         </p:spPr>
+        <p:txBody>
+          <a:bodyPr/>
+          <a:lstStyle/>
+          <a:p>
+            <a:endParaRPr lang="en-IN"/>
+          </a:p>
+        </p:txBody>
       </p:sp>
       <p:sp>
         <p:nvSpPr>
@@ -2217,6 +3530,13 @@
             </a:outerShdw>
           </a:effectLst>
         </p:spPr>
+        <p:txBody>
+          <a:bodyPr/>
+          <a:lstStyle/>
+          <a:p>
+            <a:endParaRPr lang="en-IN"/>
+          </a:p>
+        </p:txBody>
       </p:sp>
       <p:sp>
         <p:nvSpPr>
@@ -2278,6 +3598,13 @@
             <a:prstDash val="solid"/>
           </a:ln>
         </p:spPr>
+        <p:txBody>
+          <a:bodyPr/>
+          <a:lstStyle/>
+          <a:p>
+            <a:endParaRPr lang="en-IN"/>
+          </a:p>
+        </p:txBody>
       </p:sp>
       <p:sp>
         <p:nvSpPr>
@@ -2388,6 +3715,13 @@
             </a:outerShdw>
           </a:effectLst>
         </p:spPr>
+        <p:txBody>
+          <a:bodyPr/>
+          <a:lstStyle/>
+          <a:p>
+            <a:endParaRPr lang="en-IN"/>
+          </a:p>
+        </p:txBody>
       </p:sp>
       <p:sp>
         <p:nvSpPr>
@@ -2449,6 +3783,13 @@
             <a:prstDash val="solid"/>
           </a:ln>
         </p:spPr>
+        <p:txBody>
+          <a:bodyPr/>
+          <a:lstStyle/>
+          <a:p>
+            <a:endParaRPr lang="en-IN"/>
+          </a:p>
+        </p:txBody>
       </p:sp>
       <p:sp>
         <p:nvSpPr>
@@ -2559,6 +3900,13 @@
             </a:outerShdw>
           </a:effectLst>
         </p:spPr>
+        <p:txBody>
+          <a:bodyPr/>
+          <a:lstStyle/>
+          <a:p>
+            <a:endParaRPr lang="en-IN"/>
+          </a:p>
+        </p:txBody>
       </p:sp>
       <p:sp>
         <p:nvSpPr>
@@ -2620,6 +3968,13 @@
             <a:prstDash val="solid"/>
           </a:ln>
         </p:spPr>
+        <p:txBody>
+          <a:bodyPr/>
+          <a:lstStyle/>
+          <a:p>
+            <a:endParaRPr lang="en-IN"/>
+          </a:p>
+        </p:txBody>
       </p:sp>
       <p:sp>
         <p:nvSpPr>
@@ -2730,6 +4085,13 @@
             </a:outerShdw>
           </a:effectLst>
         </p:spPr>
+        <p:txBody>
+          <a:bodyPr/>
+          <a:lstStyle/>
+          <a:p>
+            <a:endParaRPr lang="en-IN"/>
+          </a:p>
+        </p:txBody>
       </p:sp>
       <p:sp>
         <p:nvSpPr>
@@ -2791,6 +4153,13 @@
             <a:prstDash val="solid"/>
           </a:ln>
         </p:spPr>
+        <p:txBody>
+          <a:bodyPr/>
+          <a:lstStyle/>
+          <a:p>
+            <a:endParaRPr lang="en-IN"/>
+          </a:p>
+        </p:txBody>
       </p:sp>
       <p:sp>
         <p:nvSpPr>
@@ -2895,34 +4264,6 @@
               <a:buNone/>
             </a:pPr>
             <a:endParaRPr lang="en-US" sz="2200" dirty="0"/>
-          </a:p>
-        </p:txBody>
-      </p:sp>
-      <p:sp>
-        <p:nvSpPr>
-          <p:cNvPr id="34" name="Text 32"/>
-          <p:cNvSpPr/>
-          <p:nvPr/>
-        </p:nvSpPr>
-        <p:spPr>
-          <a:xfrm>
-            <a:off x="5696712" y="4023360"/>
-            <a:ext cx="3154680" cy="621792"/>
-          </a:xfrm>
-          <a:prstGeom prst="rect">
-            <a:avLst/>
-          </a:prstGeom>
-          <a:noFill/>
-          <a:ln/>
-        </p:spPr>
-        <p:txBody>
-          <a:bodyPr wrap="square" rtlCol="0" anchor="ctr"/>
-          <a:lstStyle/>
-          <a:p>
-            <a:pPr marL="0" indent="0">
-              <a:buNone/>
-            </a:pPr>
-            <a:endParaRPr lang="en-US" sz="1000" dirty="0"/>
           </a:p>
         </p:txBody>
       </p:sp>
@@ -2934,7 +4275,7 @@
 </p:sld>
 </file>
 
-<file path=ppt/slides/slide11.xml><?xml version="1.0" encoding="utf-8"?>
+<file path=ppt/slides/slide12.xml><?xml version="1.0" encoding="utf-8"?>
 <p:sld xmlns:a="http://schemas.openxmlformats.org/drawingml/2006/main" xmlns:r="http://schemas.openxmlformats.org/officeDocument/2006/relationships" xmlns:p="http://schemas.openxmlformats.org/presentationml/2006/main">
   <p:cSld name="Slide 10">
     <p:bg>
@@ -2983,6 +4324,13 @@
             <a:prstDash val="solid"/>
           </a:ln>
         </p:spPr>
+        <p:txBody>
+          <a:bodyPr/>
+          <a:lstStyle/>
+          <a:p>
+            <a:endParaRPr lang="en-IN"/>
+          </a:p>
+        </p:txBody>
       </p:sp>
       <p:sp>
         <p:nvSpPr>
@@ -3093,6 +4441,13 @@
             </a:outerShdw>
           </a:effectLst>
         </p:spPr>
+        <p:txBody>
+          <a:bodyPr/>
+          <a:lstStyle/>
+          <a:p>
+            <a:endParaRPr lang="en-IN"/>
+          </a:p>
+        </p:txBody>
       </p:sp>
       <p:sp>
         <p:nvSpPr>
@@ -3118,6 +4473,13 @@
             <a:prstDash val="solid"/>
           </a:ln>
         </p:spPr>
+        <p:txBody>
+          <a:bodyPr/>
+          <a:lstStyle/>
+          <a:p>
+            <a:endParaRPr lang="en-IN"/>
+          </a:p>
+        </p:txBody>
       </p:sp>
       <p:sp>
         <p:nvSpPr>
@@ -3228,6 +4590,13 @@
             </a:outerShdw>
           </a:effectLst>
         </p:spPr>
+        <p:txBody>
+          <a:bodyPr/>
+          <a:lstStyle/>
+          <a:p>
+            <a:endParaRPr lang="en-IN"/>
+          </a:p>
+        </p:txBody>
       </p:sp>
       <p:sp>
         <p:nvSpPr>
@@ -3253,6 +4622,13 @@
             <a:prstDash val="solid"/>
           </a:ln>
         </p:spPr>
+        <p:txBody>
+          <a:bodyPr/>
+          <a:lstStyle/>
+          <a:p>
+            <a:endParaRPr lang="en-IN"/>
+          </a:p>
+        </p:txBody>
       </p:sp>
       <p:sp>
         <p:nvSpPr>
@@ -3326,7 +4702,7 @@
                 <a:ea typeface="Calibri" pitchFamily="34" charset="-122"/>
                 <a:cs typeface="Calibri" pitchFamily="34" charset="-120"/>
               </a:rPr>
-              <a:t>Send automatic notifications when vehicle enters, exits, or if payment is due</a:t>
+              <a:t>Send automatic notifications when vehicle enters, exits</a:t>
             </a:r>
             <a:endParaRPr lang="en-US" sz="1000" dirty="0"/>
           </a:p>
@@ -3363,6 +4739,13 @@
             </a:outerShdw>
           </a:effectLst>
         </p:spPr>
+        <p:txBody>
+          <a:bodyPr/>
+          <a:lstStyle/>
+          <a:p>
+            <a:endParaRPr lang="en-IN"/>
+          </a:p>
+        </p:txBody>
       </p:sp>
       <p:sp>
         <p:nvSpPr>
@@ -3388,6 +4771,13 @@
             <a:prstDash val="solid"/>
           </a:ln>
         </p:spPr>
+        <p:txBody>
+          <a:bodyPr/>
+          <a:lstStyle/>
+          <a:p>
+            <a:endParaRPr lang="en-IN"/>
+          </a:p>
+        </p:txBody>
       </p:sp>
       <p:sp>
         <p:nvSpPr>
@@ -3498,6 +4888,13 @@
             </a:outerShdw>
           </a:effectLst>
         </p:spPr>
+        <p:txBody>
+          <a:bodyPr/>
+          <a:lstStyle/>
+          <a:p>
+            <a:endParaRPr lang="en-IN"/>
+          </a:p>
+        </p:txBody>
       </p:sp>
       <p:sp>
         <p:nvSpPr>
@@ -3523,6 +4920,13 @@
             <a:prstDash val="solid"/>
           </a:ln>
         </p:spPr>
+        <p:txBody>
+          <a:bodyPr/>
+          <a:lstStyle/>
+          <a:p>
+            <a:endParaRPr lang="en-IN"/>
+          </a:p>
+        </p:txBody>
       </p:sp>
       <p:sp>
         <p:nvSpPr>
@@ -3633,6 +5037,13 @@
             </a:outerShdw>
           </a:effectLst>
         </p:spPr>
+        <p:txBody>
+          <a:bodyPr/>
+          <a:lstStyle/>
+          <a:p>
+            <a:endParaRPr lang="en-IN"/>
+          </a:p>
+        </p:txBody>
       </p:sp>
       <p:sp>
         <p:nvSpPr>
@@ -3658,6 +5069,13 @@
             <a:prstDash val="solid"/>
           </a:ln>
         </p:spPr>
+        <p:txBody>
+          <a:bodyPr/>
+          <a:lstStyle/>
+          <a:p>
+            <a:endParaRPr lang="en-IN"/>
+          </a:p>
+        </p:txBody>
       </p:sp>
       <p:sp>
         <p:nvSpPr>
@@ -3768,6 +5186,13 @@
             </a:outerShdw>
           </a:effectLst>
         </p:spPr>
+        <p:txBody>
+          <a:bodyPr/>
+          <a:lstStyle/>
+          <a:p>
+            <a:endParaRPr lang="en-IN"/>
+          </a:p>
+        </p:txBody>
       </p:sp>
       <p:sp>
         <p:nvSpPr>
@@ -3793,6 +5218,13 @@
             <a:prstDash val="solid"/>
           </a:ln>
         </p:spPr>
+        <p:txBody>
+          <a:bodyPr/>
+          <a:lstStyle/>
+          <a:p>
+            <a:endParaRPr lang="en-IN"/>
+          </a:p>
+        </p:txBody>
       </p:sp>
       <p:sp>
         <p:nvSpPr>
@@ -3880,7 +5312,7 @@
 </p:sld>
 </file>
 
-<file path=ppt/slides/slide12.xml><?xml version="1.0" encoding="utf-8"?>
+<file path=ppt/slides/slide13.xml><?xml version="1.0" encoding="utf-8"?>
 <p:sld xmlns:a="http://schemas.openxmlformats.org/drawingml/2006/main" xmlns:r="http://schemas.openxmlformats.org/officeDocument/2006/relationships" xmlns:p="http://schemas.openxmlformats.org/presentationml/2006/main">
   <p:cSld name="Slide 12">
     <p:bg>
@@ -3929,6 +5361,13 @@
             <a:prstDash val="solid"/>
           </a:ln>
         </p:spPr>
+        <p:txBody>
+          <a:bodyPr/>
+          <a:lstStyle/>
+          <a:p>
+            <a:endParaRPr lang="en-IN"/>
+          </a:p>
+        </p:txBody>
       </p:sp>
       <p:sp>
         <p:nvSpPr>
@@ -3954,6 +5393,13 @@
             <a:prstDash val="solid"/>
           </a:ln>
         </p:spPr>
+        <p:txBody>
+          <a:bodyPr/>
+          <a:lstStyle/>
+          <a:p>
+            <a:endParaRPr lang="en-IN"/>
+          </a:p>
+        </p:txBody>
       </p:sp>
       <p:sp>
         <p:nvSpPr>
@@ -4107,6 +5553,13 @@
             <a:prstDash val="solid"/>
           </a:ln>
         </p:spPr>
+        <p:txBody>
+          <a:bodyPr/>
+          <a:lstStyle/>
+          <a:p>
+            <a:endParaRPr lang="en-IN"/>
+          </a:p>
+        </p:txBody>
       </p:sp>
       <p:sp>
         <p:nvSpPr>
@@ -4256,6 +5709,13 @@
             </a:outerShdw>
           </a:effectLst>
         </p:spPr>
+        <p:txBody>
+          <a:bodyPr/>
+          <a:lstStyle/>
+          <a:p>
+            <a:endParaRPr lang="en-IN"/>
+          </a:p>
+        </p:txBody>
       </p:sp>
       <p:sp>
         <p:nvSpPr>
@@ -4402,6 +5862,13 @@
             </a:outerShdw>
           </a:effectLst>
         </p:spPr>
+        <p:txBody>
+          <a:bodyPr/>
+          <a:lstStyle/>
+          <a:p>
+            <a:endParaRPr lang="en-IN"/>
+          </a:p>
+        </p:txBody>
       </p:sp>
       <p:sp>
         <p:nvSpPr>
@@ -4548,6 +6015,13 @@
             </a:outerShdw>
           </a:effectLst>
         </p:spPr>
+        <p:txBody>
+          <a:bodyPr/>
+          <a:lstStyle/>
+          <a:p>
+            <a:endParaRPr lang="en-IN"/>
+          </a:p>
+        </p:txBody>
       </p:sp>
       <p:sp>
         <p:nvSpPr>
@@ -4720,6 +6194,13 @@
             <a:prstDash val="solid"/>
           </a:ln>
         </p:spPr>
+        <p:txBody>
+          <a:bodyPr/>
+          <a:lstStyle/>
+          <a:p>
+            <a:endParaRPr lang="en-IN"/>
+          </a:p>
+        </p:txBody>
       </p:sp>
       <p:sp>
         <p:nvSpPr>
@@ -4791,6 +6272,13 @@
             </a:outerShdw>
           </a:effectLst>
         </p:spPr>
+        <p:txBody>
+          <a:bodyPr/>
+          <a:lstStyle/>
+          <a:p>
+            <a:endParaRPr lang="en-IN"/>
+          </a:p>
+        </p:txBody>
       </p:sp>
       <p:sp>
         <p:nvSpPr>
@@ -4891,6 +6379,13 @@
             <a:prstDash val="solid"/>
           </a:ln>
         </p:spPr>
+        <p:txBody>
+          <a:bodyPr/>
+          <a:lstStyle/>
+          <a:p>
+            <a:endParaRPr lang="en-IN"/>
+          </a:p>
+        </p:txBody>
       </p:sp>
       <p:sp>
         <p:nvSpPr>
@@ -4923,6 +6418,13 @@
             </a:outerShdw>
           </a:effectLst>
         </p:spPr>
+        <p:txBody>
+          <a:bodyPr/>
+          <a:lstStyle/>
+          <a:p>
+            <a:endParaRPr lang="en-IN"/>
+          </a:p>
+        </p:txBody>
       </p:sp>
       <p:sp>
         <p:nvSpPr>
@@ -5023,6 +6525,13 @@
             <a:prstDash val="solid"/>
           </a:ln>
         </p:spPr>
+        <p:txBody>
+          <a:bodyPr/>
+          <a:lstStyle/>
+          <a:p>
+            <a:endParaRPr lang="en-IN"/>
+          </a:p>
+        </p:txBody>
       </p:sp>
       <p:sp>
         <p:nvSpPr>
@@ -5055,6 +6564,13 @@
             </a:outerShdw>
           </a:effectLst>
         </p:spPr>
+        <p:txBody>
+          <a:bodyPr/>
+          <a:lstStyle/>
+          <a:p>
+            <a:endParaRPr lang="en-IN"/>
+          </a:p>
+        </p:txBody>
       </p:sp>
       <p:sp>
         <p:nvSpPr>
@@ -5155,6 +6671,13 @@
             <a:prstDash val="solid"/>
           </a:ln>
         </p:spPr>
+        <p:txBody>
+          <a:bodyPr/>
+          <a:lstStyle/>
+          <a:p>
+            <a:endParaRPr lang="en-IN"/>
+          </a:p>
+        </p:txBody>
       </p:sp>
       <p:sp>
         <p:nvSpPr>
@@ -5187,6 +6710,13 @@
             </a:outerShdw>
           </a:effectLst>
         </p:spPr>
+        <p:txBody>
+          <a:bodyPr/>
+          <a:lstStyle/>
+          <a:p>
+            <a:endParaRPr lang="en-IN"/>
+          </a:p>
+        </p:txBody>
       </p:sp>
       <p:sp>
         <p:nvSpPr>
@@ -5287,6 +6817,13 @@
             <a:prstDash val="solid"/>
           </a:ln>
         </p:spPr>
+        <p:txBody>
+          <a:bodyPr/>
+          <a:lstStyle/>
+          <a:p>
+            <a:endParaRPr lang="en-IN"/>
+          </a:p>
+        </p:txBody>
       </p:sp>
       <p:sp>
         <p:nvSpPr>
@@ -5319,6 +6856,13 @@
             </a:outerShdw>
           </a:effectLst>
         </p:spPr>
+        <p:txBody>
+          <a:bodyPr/>
+          <a:lstStyle/>
+          <a:p>
+            <a:endParaRPr lang="en-IN"/>
+          </a:p>
+        </p:txBody>
       </p:sp>
       <p:sp>
         <p:nvSpPr>
@@ -5745,6 +7289,13 @@
             </a:outerShdw>
           </a:effectLst>
         </p:spPr>
+        <p:txBody>
+          <a:bodyPr/>
+          <a:lstStyle/>
+          <a:p>
+            <a:endParaRPr lang="en-IN"/>
+          </a:p>
+        </p:txBody>
       </p:sp>
       <p:sp>
         <p:nvSpPr>
@@ -5889,6 +7440,13 @@
             </a:outerShdw>
           </a:effectLst>
         </p:spPr>
+        <p:txBody>
+          <a:bodyPr/>
+          <a:lstStyle/>
+          <a:p>
+            <a:endParaRPr lang="en-IN"/>
+          </a:p>
+        </p:txBody>
       </p:sp>
       <p:sp>
         <p:nvSpPr>
@@ -6020,6 +7578,13 @@
             <a:prstDash val="solid"/>
           </a:ln>
         </p:spPr>
+        <p:txBody>
+          <a:bodyPr/>
+          <a:lstStyle/>
+          <a:p>
+            <a:endParaRPr lang="en-IN"/>
+          </a:p>
+        </p:txBody>
       </p:sp>
       <p:sp>
         <p:nvSpPr>
@@ -6084,6 +7649,13 @@
             <a:prstDash val="solid"/>
           </a:ln>
         </p:spPr>
+        <p:txBody>
+          <a:bodyPr/>
+          <a:lstStyle/>
+          <a:p>
+            <a:endParaRPr lang="en-IN"/>
+          </a:p>
+        </p:txBody>
       </p:sp>
       <p:sp>
         <p:nvSpPr>
@@ -6152,6 +7724,13 @@
             </a:outerShdw>
           </a:effectLst>
         </p:spPr>
+        <p:txBody>
+          <a:bodyPr/>
+          <a:lstStyle/>
+          <a:p>
+            <a:endParaRPr lang="en-IN"/>
+          </a:p>
+        </p:txBody>
       </p:sp>
       <p:sp>
         <p:nvSpPr>
@@ -6255,6 +7834,13 @@
             <a:prstDash val="solid"/>
           </a:ln>
         </p:spPr>
+        <p:txBody>
+          <a:bodyPr/>
+          <a:lstStyle/>
+          <a:p>
+            <a:endParaRPr lang="en-IN"/>
+          </a:p>
+        </p:txBody>
       </p:sp>
       <p:sp>
         <p:nvSpPr>
@@ -6280,6 +7866,13 @@
             <a:prstDash val="solid"/>
           </a:ln>
         </p:spPr>
+        <p:txBody>
+          <a:bodyPr/>
+          <a:lstStyle/>
+          <a:p>
+            <a:endParaRPr lang="en-IN"/>
+          </a:p>
+        </p:txBody>
       </p:sp>
       <p:sp>
         <p:nvSpPr>
@@ -6348,6 +7941,13 @@
             </a:outerShdw>
           </a:effectLst>
         </p:spPr>
+        <p:txBody>
+          <a:bodyPr/>
+          <a:lstStyle/>
+          <a:p>
+            <a:endParaRPr lang="en-IN"/>
+          </a:p>
+        </p:txBody>
       </p:sp>
       <p:sp>
         <p:nvSpPr>
@@ -6451,6 +8051,13 @@
             <a:prstDash val="solid"/>
           </a:ln>
         </p:spPr>
+        <p:txBody>
+          <a:bodyPr/>
+          <a:lstStyle/>
+          <a:p>
+            <a:endParaRPr lang="en-IN"/>
+          </a:p>
+        </p:txBody>
       </p:sp>
       <p:sp>
         <p:nvSpPr>
@@ -6476,6 +8083,13 @@
             <a:prstDash val="solid"/>
           </a:ln>
         </p:spPr>
+        <p:txBody>
+          <a:bodyPr/>
+          <a:lstStyle/>
+          <a:p>
+            <a:endParaRPr lang="en-IN"/>
+          </a:p>
+        </p:txBody>
       </p:sp>
       <p:sp>
         <p:nvSpPr>
@@ -6544,6 +8158,13 @@
             </a:outerShdw>
           </a:effectLst>
         </p:spPr>
+        <p:txBody>
+          <a:bodyPr/>
+          <a:lstStyle/>
+          <a:p>
+            <a:endParaRPr lang="en-IN"/>
+          </a:p>
+        </p:txBody>
       </p:sp>
       <p:sp>
         <p:nvSpPr>
@@ -6647,6 +8268,13 @@
             <a:prstDash val="solid"/>
           </a:ln>
         </p:spPr>
+        <p:txBody>
+          <a:bodyPr/>
+          <a:lstStyle/>
+          <a:p>
+            <a:endParaRPr lang="en-IN"/>
+          </a:p>
+        </p:txBody>
       </p:sp>
       <p:sp>
         <p:nvSpPr>
@@ -6672,6 +8300,13 @@
             <a:prstDash val="solid"/>
           </a:ln>
         </p:spPr>
+        <p:txBody>
+          <a:bodyPr/>
+          <a:lstStyle/>
+          <a:p>
+            <a:endParaRPr lang="en-IN"/>
+          </a:p>
+        </p:txBody>
       </p:sp>
       <p:sp>
         <p:nvSpPr>
@@ -6740,6 +8375,13 @@
             </a:outerShdw>
           </a:effectLst>
         </p:spPr>
+        <p:txBody>
+          <a:bodyPr/>
+          <a:lstStyle/>
+          <a:p>
+            <a:endParaRPr lang="en-IN"/>
+          </a:p>
+        </p:txBody>
       </p:sp>
       <p:sp>
         <p:nvSpPr>
@@ -6843,6 +8485,13 @@
             <a:prstDash val="solid"/>
           </a:ln>
         </p:spPr>
+        <p:txBody>
+          <a:bodyPr/>
+          <a:lstStyle/>
+          <a:p>
+            <a:endParaRPr lang="en-IN"/>
+          </a:p>
+        </p:txBody>
       </p:sp>
       <p:sp>
         <p:nvSpPr>
@@ -6868,6 +8517,13 @@
             <a:prstDash val="solid"/>
           </a:ln>
         </p:spPr>
+        <p:txBody>
+          <a:bodyPr/>
+          <a:lstStyle/>
+          <a:p>
+            <a:endParaRPr lang="en-IN"/>
+          </a:p>
+        </p:txBody>
       </p:sp>
       <p:sp>
         <p:nvSpPr>
@@ -6936,6 +8592,13 @@
             </a:outerShdw>
           </a:effectLst>
         </p:spPr>
+        <p:txBody>
+          <a:bodyPr/>
+          <a:lstStyle/>
+          <a:p>
+            <a:endParaRPr lang="en-IN"/>
+          </a:p>
+        </p:txBody>
       </p:sp>
       <p:sp>
         <p:nvSpPr>
@@ -7072,6 +8735,13 @@
             <a:prstDash val="solid"/>
           </a:ln>
         </p:spPr>
+        <p:txBody>
+          <a:bodyPr/>
+          <a:lstStyle/>
+          <a:p>
+            <a:endParaRPr lang="en-IN"/>
+          </a:p>
+        </p:txBody>
       </p:sp>
       <p:sp>
         <p:nvSpPr>
@@ -7143,6 +8813,13 @@
             </a:outerShdw>
           </a:effectLst>
         </p:spPr>
+        <p:txBody>
+          <a:bodyPr/>
+          <a:lstStyle/>
+          <a:p>
+            <a:endParaRPr lang="en-IN"/>
+          </a:p>
+        </p:txBody>
       </p:sp>
       <p:sp>
         <p:nvSpPr>
@@ -7246,6 +8923,13 @@
             <a:prstDash val="solid"/>
           </a:ln>
         </p:spPr>
+        <p:txBody>
+          <a:bodyPr/>
+          <a:lstStyle/>
+          <a:p>
+            <a:endParaRPr lang="en-IN"/>
+          </a:p>
+        </p:txBody>
       </p:sp>
       <p:sp>
         <p:nvSpPr>
@@ -7346,6 +9030,13 @@
             <a:prstDash val="solid"/>
           </a:ln>
         </p:spPr>
+        <p:txBody>
+          <a:bodyPr/>
+          <a:lstStyle/>
+          <a:p>
+            <a:endParaRPr lang="en-IN"/>
+          </a:p>
+        </p:txBody>
       </p:sp>
       <p:sp>
         <p:nvSpPr>
@@ -7446,6 +9137,13 @@
             <a:prstDash val="solid"/>
           </a:ln>
         </p:spPr>
+        <p:txBody>
+          <a:bodyPr/>
+          <a:lstStyle/>
+          <a:p>
+            <a:endParaRPr lang="en-IN"/>
+          </a:p>
+        </p:txBody>
       </p:sp>
       <p:sp>
         <p:nvSpPr>
@@ -7568,6 +9266,13 @@
             <a:prstDash val="solid"/>
           </a:ln>
         </p:spPr>
+        <p:txBody>
+          <a:bodyPr/>
+          <a:lstStyle/>
+          <a:p>
+            <a:endParaRPr lang="en-IN"/>
+          </a:p>
+        </p:txBody>
       </p:sp>
       <p:sp>
         <p:nvSpPr>
@@ -7668,6 +9373,13 @@
             <a:prstDash val="solid"/>
           </a:ln>
         </p:spPr>
+        <p:txBody>
+          <a:bodyPr/>
+          <a:lstStyle/>
+          <a:p>
+            <a:endParaRPr lang="en-IN"/>
+          </a:p>
+        </p:txBody>
       </p:sp>
       <p:sp>
         <p:nvSpPr>
@@ -7801,6 +9513,13 @@
             <a:prstDash val="solid"/>
           </a:ln>
         </p:spPr>
+        <p:txBody>
+          <a:bodyPr/>
+          <a:lstStyle/>
+          <a:p>
+            <a:endParaRPr lang="en-IN"/>
+          </a:p>
+        </p:txBody>
       </p:sp>
       <p:sp>
         <p:nvSpPr>
@@ -8679,6 +10398,13 @@
             <a:prstDash val="solid"/>
           </a:ln>
         </p:spPr>
+        <p:txBody>
+          <a:bodyPr/>
+          <a:lstStyle/>
+          <a:p>
+            <a:endParaRPr lang="en-IN"/>
+          </a:p>
+        </p:txBody>
       </p:sp>
       <p:sp>
         <p:nvSpPr>
@@ -8789,6 +10515,13 @@
             </a:outerShdw>
           </a:effectLst>
         </p:spPr>
+        <p:txBody>
+          <a:bodyPr/>
+          <a:lstStyle/>
+          <a:p>
+            <a:endParaRPr lang="en-IN"/>
+          </a:p>
+        </p:txBody>
       </p:sp>
       <p:sp>
         <p:nvSpPr>
@@ -8814,6 +10547,13 @@
             <a:prstDash val="solid"/>
           </a:ln>
         </p:spPr>
+        <p:txBody>
+          <a:bodyPr/>
+          <a:lstStyle/>
+          <a:p>
+            <a:endParaRPr lang="en-IN"/>
+          </a:p>
+        </p:txBody>
       </p:sp>
       <p:sp>
         <p:nvSpPr>
@@ -8917,6 +10657,13 @@
             <a:prstDash val="solid"/>
           </a:ln>
         </p:spPr>
+        <p:txBody>
+          <a:bodyPr/>
+          <a:lstStyle/>
+          <a:p>
+            <a:endParaRPr lang="en-IN"/>
+          </a:p>
+        </p:txBody>
       </p:sp>
       <p:sp>
         <p:nvSpPr>
@@ -8981,6 +10728,13 @@
             <a:prstDash val="solid"/>
           </a:ln>
         </p:spPr>
+        <p:txBody>
+          <a:bodyPr/>
+          <a:lstStyle/>
+          <a:p>
+            <a:endParaRPr lang="en-IN"/>
+          </a:p>
+        </p:txBody>
       </p:sp>
       <p:sp>
         <p:nvSpPr>
@@ -9045,6 +10799,13 @@
             <a:prstDash val="solid"/>
           </a:ln>
         </p:spPr>
+        <p:txBody>
+          <a:bodyPr/>
+          <a:lstStyle/>
+          <a:p>
+            <a:endParaRPr lang="en-IN"/>
+          </a:p>
+        </p:txBody>
       </p:sp>
       <p:sp>
         <p:nvSpPr>
@@ -9109,6 +10870,13 @@
             <a:prstDash val="solid"/>
           </a:ln>
         </p:spPr>
+        <p:txBody>
+          <a:bodyPr/>
+          <a:lstStyle/>
+          <a:p>
+            <a:endParaRPr lang="en-IN"/>
+          </a:p>
+        </p:txBody>
       </p:sp>
       <p:sp>
         <p:nvSpPr>
@@ -9173,6 +10941,13 @@
             <a:prstDash val="solid"/>
           </a:ln>
         </p:spPr>
+        <p:txBody>
+          <a:bodyPr/>
+          <a:lstStyle/>
+          <a:p>
+            <a:endParaRPr lang="en-IN"/>
+          </a:p>
+        </p:txBody>
       </p:sp>
       <p:sp>
         <p:nvSpPr>
@@ -9300,6 +11075,13 @@
             </a:outerShdw>
           </a:effectLst>
         </p:spPr>
+        <p:txBody>
+          <a:bodyPr/>
+          <a:lstStyle/>
+          <a:p>
+            <a:endParaRPr lang="en-IN"/>
+          </a:p>
+        </p:txBody>
       </p:sp>
       <p:sp>
         <p:nvSpPr>
@@ -9325,6 +11107,13 @@
             <a:prstDash val="solid"/>
           </a:ln>
         </p:spPr>
+        <p:txBody>
+          <a:bodyPr/>
+          <a:lstStyle/>
+          <a:p>
+            <a:endParaRPr lang="en-IN"/>
+          </a:p>
+        </p:txBody>
       </p:sp>
       <p:sp>
         <p:nvSpPr>
@@ -9428,6 +11217,13 @@
             <a:prstDash val="solid"/>
           </a:ln>
         </p:spPr>
+        <p:txBody>
+          <a:bodyPr/>
+          <a:lstStyle/>
+          <a:p>
+            <a:endParaRPr lang="en-IN"/>
+          </a:p>
+        </p:txBody>
       </p:sp>
       <p:sp>
         <p:nvSpPr>
@@ -9492,6 +11288,13 @@
             <a:prstDash val="solid"/>
           </a:ln>
         </p:spPr>
+        <p:txBody>
+          <a:bodyPr/>
+          <a:lstStyle/>
+          <a:p>
+            <a:endParaRPr lang="en-IN"/>
+          </a:p>
+        </p:txBody>
       </p:sp>
       <p:sp>
         <p:nvSpPr>
@@ -9556,6 +11359,13 @@
             <a:prstDash val="solid"/>
           </a:ln>
         </p:spPr>
+        <p:txBody>
+          <a:bodyPr/>
+          <a:lstStyle/>
+          <a:p>
+            <a:endParaRPr lang="en-IN"/>
+          </a:p>
+        </p:txBody>
       </p:sp>
       <p:sp>
         <p:nvSpPr>
@@ -9620,6 +11430,13 @@
             <a:prstDash val="solid"/>
           </a:ln>
         </p:spPr>
+        <p:txBody>
+          <a:bodyPr/>
+          <a:lstStyle/>
+          <a:p>
+            <a:endParaRPr lang="en-IN"/>
+          </a:p>
+        </p:txBody>
       </p:sp>
       <p:sp>
         <p:nvSpPr>
@@ -9697,6 +11514,129 @@
 </file>
 
 <file path=ppt/slides/slide8.xml><?xml version="1.0" encoding="utf-8"?>
+<p:sld xmlns:a="http://schemas.openxmlformats.org/drawingml/2006/main" xmlns:r="http://schemas.openxmlformats.org/officeDocument/2006/relationships" xmlns:p="http://schemas.openxmlformats.org/presentationml/2006/main">
+  <p:cSld>
+    <p:spTree>
+      <p:nvGrpSpPr>
+        <p:cNvPr id="1" name=""/>
+        <p:cNvGrpSpPr/>
+        <p:nvPr/>
+      </p:nvGrpSpPr>
+      <p:grpSpPr>
+        <a:xfrm>
+          <a:off x="0" y="0"/>
+          <a:ext cx="0" cy="0"/>
+          <a:chOff x="0" y="0"/>
+          <a:chExt cx="0" cy="0"/>
+        </a:xfrm>
+      </p:grpSpPr>
+      <p:pic>
+        <p:nvPicPr>
+          <p:cNvPr id="5" name="Picture 4">
+            <a:extLst>
+              <a:ext uri="{FF2B5EF4-FFF2-40B4-BE49-F238E27FC236}">
+                <a16:creationId xmlns:a16="http://schemas.microsoft.com/office/drawing/2014/main" id="{C9DC6144-02AB-7A30-A0EB-93744E26CB78}"/>
+              </a:ext>
+            </a:extLst>
+          </p:cNvPr>
+          <p:cNvPicPr>
+            <a:picLocks noChangeAspect="1"/>
+          </p:cNvPicPr>
+          <p:nvPr/>
+        </p:nvPicPr>
+        <p:blipFill>
+          <a:blip r:embed="rId2"/>
+          <a:stretch>
+            <a:fillRect/>
+          </a:stretch>
+        </p:blipFill>
+        <p:spPr>
+          <a:xfrm>
+            <a:off x="0" y="542108"/>
+            <a:ext cx="9144000" cy="4601392"/>
+          </a:xfrm>
+          <a:prstGeom prst="rect">
+            <a:avLst/>
+          </a:prstGeom>
+        </p:spPr>
+      </p:pic>
+      <p:sp>
+        <p:nvSpPr>
+          <p:cNvPr id="6" name="Shape 0">
+            <a:extLst>
+              <a:ext uri="{FF2B5EF4-FFF2-40B4-BE49-F238E27FC236}">
+                <a16:creationId xmlns:a16="http://schemas.microsoft.com/office/drawing/2014/main" id="{8A415310-15F0-79D2-616F-7BD4D153F339}"/>
+              </a:ext>
+            </a:extLst>
+          </p:cNvPr>
+          <p:cNvSpPr/>
+          <p:nvPr/>
+        </p:nvSpPr>
+        <p:spPr>
+          <a:xfrm>
+            <a:off x="0" y="0"/>
+            <a:ext cx="9144000" cy="542108"/>
+          </a:xfrm>
+          <a:prstGeom prst="rect">
+            <a:avLst/>
+          </a:prstGeom>
+          <a:solidFill>
+            <a:srgbClr val="1B2A4A"/>
+          </a:solidFill>
+          <a:ln w="12700">
+            <a:solidFill>
+              <a:srgbClr val="1B2A4A"/>
+            </a:solidFill>
+            <a:prstDash val="solid"/>
+          </a:ln>
+        </p:spPr>
+        <p:txBody>
+          <a:bodyPr/>
+          <a:lstStyle/>
+          <a:p>
+            <a:r>
+              <a:rPr lang="en-US" sz="2400" b="1" dirty="0">
+                <a:solidFill>
+                  <a:srgbClr val="FFFFFF"/>
+                </a:solidFill>
+                <a:latin typeface="Calibri" pitchFamily="34" charset="0"/>
+                <a:ea typeface="Calibri" pitchFamily="34" charset="-122"/>
+                <a:cs typeface="Calibri" pitchFamily="34" charset="-120"/>
+              </a:rPr>
+              <a:t>     </a:t>
+            </a:r>
+            <a:r>
+              <a:rPr lang="en-US" sz="2400" b="1" dirty="0" err="1">
+                <a:solidFill>
+                  <a:srgbClr val="FFFFFF"/>
+                </a:solidFill>
+                <a:latin typeface="Calibri" pitchFamily="34" charset="0"/>
+                <a:ea typeface="Calibri" pitchFamily="34" charset="-122"/>
+                <a:cs typeface="Calibri" pitchFamily="34" charset="-120"/>
+              </a:rPr>
+              <a:t>Parking.db</a:t>
+            </a:r>
+            <a:endParaRPr lang="en-US" sz="2400" dirty="0"/>
+          </a:p>
+          <a:p>
+            <a:endParaRPr lang="en-IN" dirty="0"/>
+          </a:p>
+        </p:txBody>
+      </p:sp>
+    </p:spTree>
+    <p:extLst>
+      <p:ext uri="{BB962C8B-B14F-4D97-AF65-F5344CB8AC3E}">
+        <p14:creationId xmlns:p14="http://schemas.microsoft.com/office/powerpoint/2010/main" val="956881570"/>
+      </p:ext>
+    </p:extLst>
+  </p:cSld>
+  <p:clrMapOvr>
+    <a:masterClrMapping/>
+  </p:clrMapOvr>
+</p:sld>
+</file>
+
+<file path=ppt/slides/slide9.xml><?xml version="1.0" encoding="utf-8"?>
 <p:sld xmlns:a="http://schemas.openxmlformats.org/drawingml/2006/main" xmlns:r="http://schemas.openxmlformats.org/officeDocument/2006/relationships" xmlns:p="http://schemas.openxmlformats.org/presentationml/2006/main">
   <p:cSld name="Slide 8">
     <p:bg>
@@ -9745,6 +11685,13 @@
             <a:prstDash val="solid"/>
           </a:ln>
         </p:spPr>
+        <p:txBody>
+          <a:bodyPr/>
+          <a:lstStyle/>
+          <a:p>
+            <a:endParaRPr lang="en-IN"/>
+          </a:p>
+        </p:txBody>
       </p:sp>
       <p:sp>
         <p:nvSpPr>
@@ -9848,6 +11795,13 @@
             <a:prstDash val="solid"/>
           </a:ln>
         </p:spPr>
+        <p:txBody>
+          <a:bodyPr/>
+          <a:lstStyle/>
+          <a:p>
+            <a:endParaRPr lang="en-IN"/>
+          </a:p>
+        </p:txBody>
       </p:sp>
       <p:sp>
         <p:nvSpPr>
@@ -9919,6 +11873,13 @@
             </a:outerShdw>
           </a:effectLst>
         </p:spPr>
+        <p:txBody>
+          <a:bodyPr/>
+          <a:lstStyle/>
+          <a:p>
+            <a:endParaRPr lang="en-IN"/>
+          </a:p>
+        </p:txBody>
       </p:sp>
       <p:sp>
         <p:nvSpPr>
@@ -10050,6 +12011,13 @@
             <a:prstDash val="solid"/>
           </a:ln>
         </p:spPr>
+        <p:txBody>
+          <a:bodyPr/>
+          <a:lstStyle/>
+          <a:p>
+            <a:endParaRPr lang="en-IN"/>
+          </a:p>
+        </p:txBody>
       </p:sp>
       <p:sp>
         <p:nvSpPr>
@@ -10121,6 +12089,13 @@
             </a:outerShdw>
           </a:effectLst>
         </p:spPr>
+        <p:txBody>
+          <a:bodyPr/>
+          <a:lstStyle/>
+          <a:p>
+            <a:endParaRPr lang="en-IN"/>
+          </a:p>
+        </p:txBody>
       </p:sp>
       <p:sp>
         <p:nvSpPr>
@@ -10224,6 +12199,13 @@
             <a:prstDash val="solid"/>
           </a:ln>
         </p:spPr>
+        <p:txBody>
+          <a:bodyPr/>
+          <a:lstStyle/>
+          <a:p>
+            <a:endParaRPr lang="en-IN"/>
+          </a:p>
+        </p:txBody>
       </p:sp>
       <p:sp>
         <p:nvSpPr>
@@ -10295,6 +12277,13 @@
             </a:outerShdw>
           </a:effectLst>
         </p:spPr>
+        <p:txBody>
+          <a:bodyPr/>
+          <a:lstStyle/>
+          <a:p>
+            <a:endParaRPr lang="en-IN"/>
+          </a:p>
+        </p:txBody>
       </p:sp>
       <p:sp>
         <p:nvSpPr>
@@ -10398,6 +12387,13 @@
             <a:prstDash val="solid"/>
           </a:ln>
         </p:spPr>
+        <p:txBody>
+          <a:bodyPr/>
+          <a:lstStyle/>
+          <a:p>
+            <a:endParaRPr lang="en-IN"/>
+          </a:p>
+        </p:txBody>
       </p:sp>
       <p:sp>
         <p:nvSpPr>
@@ -10579,6 +12575,13 @@
             <a:prstDash val="solid"/>
           </a:ln>
         </p:spPr>
+        <p:txBody>
+          <a:bodyPr/>
+          <a:lstStyle/>
+          <a:p>
+            <a:endParaRPr lang="en-IN"/>
+          </a:p>
+        </p:txBody>
       </p:sp>
       <p:sp>
         <p:nvSpPr>
@@ -10650,6 +12653,13 @@
             </a:outerShdw>
           </a:effectLst>
         </p:spPr>
+        <p:txBody>
+          <a:bodyPr/>
+          <a:lstStyle/>
+          <a:p>
+            <a:endParaRPr lang="en-IN"/>
+          </a:p>
+        </p:txBody>
       </p:sp>
       <p:sp>
         <p:nvSpPr>
@@ -10724,1136 +12734,6 @@
                 <a:cs typeface="Calibri" pitchFamily="34" charset="-120"/>
               </a:rPr>
               <a:t>Connect all parts together, test end-to-end, fix bugs, do final demo</a:t>
-            </a:r>
-            <a:endParaRPr lang="en-US" sz="1000" dirty="0"/>
-          </a:p>
-        </p:txBody>
-      </p:sp>
-    </p:spTree>
-  </p:cSld>
-  <p:clrMapOvr>
-    <a:masterClrMapping/>
-  </p:clrMapOvr>
-</p:sld>
-</file>
-
-<file path=ppt/slides/slide9.xml><?xml version="1.0" encoding="utf-8"?>
-<p:sld xmlns:a="http://schemas.openxmlformats.org/drawingml/2006/main" xmlns:r="http://schemas.openxmlformats.org/officeDocument/2006/relationships" xmlns:p="http://schemas.openxmlformats.org/presentationml/2006/main">
-  <p:cSld name="Slide 11">
-    <p:bg>
-      <p:bgPr>
-        <a:solidFill>
-          <a:srgbClr val="F4F8FC"/>
-        </a:solidFill>
-        <a:effectLst/>
-      </p:bgPr>
-    </p:bg>
-    <p:spTree>
-      <p:nvGrpSpPr>
-        <p:cNvPr id="1" name=""/>
-        <p:cNvGrpSpPr/>
-        <p:nvPr/>
-      </p:nvGrpSpPr>
-      <p:grpSpPr>
-        <a:xfrm>
-          <a:off x="0" y="0"/>
-          <a:ext cx="0" cy="0"/>
-          <a:chOff x="0" y="0"/>
-          <a:chExt cx="0" cy="0"/>
-        </a:xfrm>
-      </p:grpSpPr>
-      <p:sp>
-        <p:nvSpPr>
-          <p:cNvPr id="2" name="Shape 0"/>
-          <p:cNvSpPr/>
-          <p:nvPr/>
-        </p:nvSpPr>
-        <p:spPr>
-          <a:xfrm>
-            <a:off x="0" y="0"/>
-            <a:ext cx="9144000" cy="658368"/>
-          </a:xfrm>
-          <a:prstGeom prst="rect">
-            <a:avLst/>
-          </a:prstGeom>
-          <a:solidFill>
-            <a:srgbClr val="1B2A4A"/>
-          </a:solidFill>
-          <a:ln w="12700">
-            <a:solidFill>
-              <a:srgbClr val="1B2A4A"/>
-            </a:solidFill>
-            <a:prstDash val="solid"/>
-          </a:ln>
-        </p:spPr>
-      </p:sp>
-      <p:sp>
-        <p:nvSpPr>
-          <p:cNvPr id="3" name="Text 1"/>
-          <p:cNvSpPr/>
-          <p:nvPr/>
-        </p:nvSpPr>
-        <p:spPr>
-          <a:xfrm>
-            <a:off x="365760" y="0"/>
-            <a:ext cx="8412480" cy="658368"/>
-          </a:xfrm>
-          <a:prstGeom prst="rect">
-            <a:avLst/>
-          </a:prstGeom>
-          <a:noFill/>
-          <a:ln/>
-        </p:spPr>
-        <p:txBody>
-          <a:bodyPr wrap="square" rtlCol="0" anchor="ctr"/>
-          <a:lstStyle/>
-          <a:p>
-            <a:pPr marL="0" indent="0">
-              <a:buNone/>
-            </a:pPr>
-            <a:r>
-              <a:rPr lang="en-US" sz="2200" b="1" dirty="0">
-                <a:solidFill>
-                  <a:srgbClr val="FFFFFF"/>
-                </a:solidFill>
-                <a:latin typeface="Calibri" pitchFamily="34" charset="0"/>
-                <a:ea typeface="Calibri" pitchFamily="34" charset="-122"/>
-                <a:cs typeface="Calibri" pitchFamily="34" charset="-120"/>
-              </a:rPr>
-              <a:t>Key Packages Used</a:t>
-            </a:r>
-            <a:endParaRPr lang="en-US" sz="2200" dirty="0"/>
-          </a:p>
-        </p:txBody>
-      </p:sp>
-      <p:sp>
-        <p:nvSpPr>
-          <p:cNvPr id="4" name="Text 2"/>
-          <p:cNvSpPr/>
-          <p:nvPr/>
-        </p:nvSpPr>
-        <p:spPr>
-          <a:xfrm>
-            <a:off x="365760" y="749808"/>
-            <a:ext cx="8412480" cy="320040"/>
-          </a:xfrm>
-          <a:prstGeom prst="rect">
-            <a:avLst/>
-          </a:prstGeom>
-          <a:noFill/>
-          <a:ln/>
-        </p:spPr>
-        <p:txBody>
-          <a:bodyPr wrap="square" rtlCol="0" anchor="ctr"/>
-          <a:lstStyle/>
-          <a:p>
-            <a:pPr marL="0" indent="0">
-              <a:buNone/>
-            </a:pPr>
-            <a:r>
-              <a:rPr lang="en-US" sz="1300" dirty="0">
-                <a:solidFill>
-                  <a:srgbClr val="64748B"/>
-                </a:solidFill>
-                <a:latin typeface="Calibri" pitchFamily="34" charset="0"/>
-                <a:ea typeface="Calibri" pitchFamily="34" charset="-122"/>
-                <a:cs typeface="Calibri" pitchFamily="34" charset="-120"/>
-              </a:rPr>
-              <a:t>The main Python libraries and tools we are using:</a:t>
-            </a:r>
-            <a:endParaRPr lang="en-US" sz="1300" dirty="0"/>
-          </a:p>
-        </p:txBody>
-      </p:sp>
-      <p:sp>
-        <p:nvSpPr>
-          <p:cNvPr id="5" name="Shape 3"/>
-          <p:cNvSpPr/>
-          <p:nvPr/>
-        </p:nvSpPr>
-        <p:spPr>
-          <a:xfrm>
-            <a:off x="365760" y="1170432"/>
-            <a:ext cx="8412480" cy="384048"/>
-          </a:xfrm>
-          <a:prstGeom prst="rect">
-            <a:avLst/>
-          </a:prstGeom>
-          <a:solidFill>
-            <a:srgbClr val="1B2A4A"/>
-          </a:solidFill>
-          <a:ln w="12700">
-            <a:solidFill>
-              <a:srgbClr val="1B2A4A"/>
-            </a:solidFill>
-            <a:prstDash val="solid"/>
-          </a:ln>
-        </p:spPr>
-      </p:sp>
-      <p:sp>
-        <p:nvSpPr>
-          <p:cNvPr id="6" name="Text 4"/>
-          <p:cNvSpPr/>
-          <p:nvPr/>
-        </p:nvSpPr>
-        <p:spPr>
-          <a:xfrm>
-            <a:off x="457200" y="1170432"/>
-            <a:ext cx="1828800" cy="384048"/>
-          </a:xfrm>
-          <a:prstGeom prst="rect">
-            <a:avLst/>
-          </a:prstGeom>
-          <a:noFill/>
-          <a:ln/>
-        </p:spPr>
-        <p:txBody>
-          <a:bodyPr wrap="square" rtlCol="0" anchor="ctr"/>
-          <a:lstStyle/>
-          <a:p>
-            <a:pPr marL="0" indent="0">
-              <a:buNone/>
-            </a:pPr>
-            <a:r>
-              <a:rPr lang="en-US" sz="1200" b="1" dirty="0">
-                <a:solidFill>
-                  <a:srgbClr val="FFFFFF"/>
-                </a:solidFill>
-                <a:latin typeface="Calibri" pitchFamily="34" charset="0"/>
-                <a:ea typeface="Calibri" pitchFamily="34" charset="-122"/>
-                <a:cs typeface="Calibri" pitchFamily="34" charset="-120"/>
-              </a:rPr>
-              <a:t>Module</a:t>
-            </a:r>
-            <a:endParaRPr lang="en-US" sz="1200" dirty="0"/>
-          </a:p>
-        </p:txBody>
-      </p:sp>
-      <p:sp>
-        <p:nvSpPr>
-          <p:cNvPr id="7" name="Text 5"/>
-          <p:cNvSpPr/>
-          <p:nvPr/>
-        </p:nvSpPr>
-        <p:spPr>
-          <a:xfrm>
-            <a:off x="2377440" y="1170432"/>
-            <a:ext cx="2560320" cy="384048"/>
-          </a:xfrm>
-          <a:prstGeom prst="rect">
-            <a:avLst/>
-          </a:prstGeom>
-          <a:noFill/>
-          <a:ln/>
-        </p:spPr>
-        <p:txBody>
-          <a:bodyPr wrap="square" rtlCol="0" anchor="ctr"/>
-          <a:lstStyle/>
-          <a:p>
-            <a:pPr marL="0" indent="0">
-              <a:buNone/>
-            </a:pPr>
-            <a:r>
-              <a:rPr lang="en-US" sz="1200" b="1" dirty="0">
-                <a:solidFill>
-                  <a:srgbClr val="FFFFFF"/>
-                </a:solidFill>
-                <a:latin typeface="Calibri" pitchFamily="34" charset="0"/>
-                <a:ea typeface="Calibri" pitchFamily="34" charset="-122"/>
-                <a:cs typeface="Calibri" pitchFamily="34" charset="-120"/>
-              </a:rPr>
-              <a:t>Used For</a:t>
-            </a:r>
-            <a:endParaRPr lang="en-US" sz="1200" dirty="0"/>
-          </a:p>
-        </p:txBody>
-      </p:sp>
-      <p:sp>
-        <p:nvSpPr>
-          <p:cNvPr id="8" name="Text 6"/>
-          <p:cNvSpPr/>
-          <p:nvPr/>
-        </p:nvSpPr>
-        <p:spPr>
-          <a:xfrm>
-            <a:off x="5029200" y="1170432"/>
-            <a:ext cx="3657600" cy="384048"/>
-          </a:xfrm>
-          <a:prstGeom prst="rect">
-            <a:avLst/>
-          </a:prstGeom>
-          <a:noFill/>
-          <a:ln/>
-        </p:spPr>
-        <p:txBody>
-          <a:bodyPr wrap="square" rtlCol="0" anchor="ctr"/>
-          <a:lstStyle/>
-          <a:p>
-            <a:pPr marL="0" indent="0">
-              <a:buNone/>
-            </a:pPr>
-            <a:r>
-              <a:rPr lang="en-US" sz="1200" b="1" dirty="0">
-                <a:solidFill>
-                  <a:srgbClr val="FFFFFF"/>
-                </a:solidFill>
-                <a:latin typeface="Calibri" pitchFamily="34" charset="0"/>
-                <a:ea typeface="Calibri" pitchFamily="34" charset="-122"/>
-                <a:cs typeface="Calibri" pitchFamily="34" charset="-120"/>
-              </a:rPr>
-              <a:t>What It Does in Our Project</a:t>
-            </a:r>
-            <a:endParaRPr lang="en-US" sz="1200" dirty="0"/>
-          </a:p>
-        </p:txBody>
-      </p:sp>
-      <p:sp>
-        <p:nvSpPr>
-          <p:cNvPr id="9" name="Shape 7"/>
-          <p:cNvSpPr/>
-          <p:nvPr/>
-        </p:nvSpPr>
-        <p:spPr>
-          <a:xfrm>
-            <a:off x="365760" y="1572768"/>
-            <a:ext cx="8412480" cy="548640"/>
-          </a:xfrm>
-          <a:prstGeom prst="rect">
-            <a:avLst/>
-          </a:prstGeom>
-          <a:solidFill>
-            <a:srgbClr val="FFFFFF"/>
-          </a:solidFill>
-          <a:ln w="12700">
-            <a:solidFill>
-              <a:srgbClr val="E2E8F0"/>
-            </a:solidFill>
-            <a:prstDash val="solid"/>
-          </a:ln>
-        </p:spPr>
-      </p:sp>
-      <p:sp>
-        <p:nvSpPr>
-          <p:cNvPr id="10" name="Text 8"/>
-          <p:cNvSpPr/>
-          <p:nvPr/>
-        </p:nvSpPr>
-        <p:spPr>
-          <a:xfrm>
-            <a:off x="457200" y="1572768"/>
-            <a:ext cx="1828800" cy="548640"/>
-          </a:xfrm>
-          <a:prstGeom prst="rect">
-            <a:avLst/>
-          </a:prstGeom>
-          <a:noFill/>
-          <a:ln/>
-        </p:spPr>
-        <p:txBody>
-          <a:bodyPr wrap="square" rtlCol="0" anchor="ctr"/>
-          <a:lstStyle/>
-          <a:p>
-            <a:pPr marL="0" indent="0">
-              <a:buNone/>
-            </a:pPr>
-            <a:r>
-              <a:rPr lang="en-US" sz="1200" b="1" dirty="0">
-                <a:solidFill>
-                  <a:srgbClr val="2E75B6"/>
-                </a:solidFill>
-                <a:latin typeface="Calibri" pitchFamily="34" charset="0"/>
-                <a:ea typeface="Calibri" pitchFamily="34" charset="-122"/>
-                <a:cs typeface="Calibri" pitchFamily="34" charset="-120"/>
-              </a:rPr>
-              <a:t>OpenCV</a:t>
-            </a:r>
-            <a:endParaRPr lang="en-US" sz="1200" dirty="0"/>
-          </a:p>
-        </p:txBody>
-      </p:sp>
-      <p:sp>
-        <p:nvSpPr>
-          <p:cNvPr id="11" name="Text 9"/>
-          <p:cNvSpPr/>
-          <p:nvPr/>
-        </p:nvSpPr>
-        <p:spPr>
-          <a:xfrm>
-            <a:off x="2377440" y="1572768"/>
-            <a:ext cx="2560320" cy="548640"/>
-          </a:xfrm>
-          <a:prstGeom prst="rect">
-            <a:avLst/>
-          </a:prstGeom>
-          <a:noFill/>
-          <a:ln/>
-        </p:spPr>
-        <p:txBody>
-          <a:bodyPr wrap="square" rtlCol="0" anchor="ctr"/>
-          <a:lstStyle/>
-          <a:p>
-            <a:pPr marL="0" indent="0">
-              <a:buNone/>
-            </a:pPr>
-            <a:r>
-              <a:rPr lang="en-US" sz="1100" dirty="0">
-                <a:solidFill>
-                  <a:srgbClr val="1B2A4A"/>
-                </a:solidFill>
-                <a:latin typeface="Calibri" pitchFamily="34" charset="0"/>
-                <a:ea typeface="Calibri" pitchFamily="34" charset="-122"/>
-                <a:cs typeface="Calibri" pitchFamily="34" charset="-120"/>
-              </a:rPr>
-              <a:t>Camera input &amp; image processing</a:t>
-            </a:r>
-            <a:endParaRPr lang="en-US" sz="1100" dirty="0"/>
-          </a:p>
-        </p:txBody>
-      </p:sp>
-      <p:sp>
-        <p:nvSpPr>
-          <p:cNvPr id="12" name="Text 10"/>
-          <p:cNvSpPr/>
-          <p:nvPr/>
-        </p:nvSpPr>
-        <p:spPr>
-          <a:xfrm>
-            <a:off x="5029200" y="1572768"/>
-            <a:ext cx="3657600" cy="548640"/>
-          </a:xfrm>
-          <a:prstGeom prst="rect">
-            <a:avLst/>
-          </a:prstGeom>
-          <a:noFill/>
-          <a:ln/>
-        </p:spPr>
-        <p:txBody>
-          <a:bodyPr wrap="square" rtlCol="0" anchor="ctr"/>
-          <a:lstStyle/>
-          <a:p>
-            <a:pPr marL="0" indent="0">
-              <a:buNone/>
-            </a:pPr>
-            <a:r>
-              <a:rPr lang="en-US" sz="1000" dirty="0">
-                <a:solidFill>
-                  <a:srgbClr val="64748B"/>
-                </a:solidFill>
-                <a:latin typeface="Calibri" pitchFamily="34" charset="0"/>
-                <a:ea typeface="Calibri" pitchFamily="34" charset="-122"/>
-                <a:cs typeface="Calibri" pitchFamily="34" charset="-120"/>
-              </a:rPr>
-              <a:t>Reads live video frames from the camera, crops the plate region</a:t>
-            </a:r>
-            <a:endParaRPr lang="en-US" sz="1000" dirty="0"/>
-          </a:p>
-        </p:txBody>
-      </p:sp>
-      <p:sp>
-        <p:nvSpPr>
-          <p:cNvPr id="13" name="Shape 11"/>
-          <p:cNvSpPr/>
-          <p:nvPr/>
-        </p:nvSpPr>
-        <p:spPr>
-          <a:xfrm>
-            <a:off x="365760" y="2139696"/>
-            <a:ext cx="8412480" cy="548640"/>
-          </a:xfrm>
-          <a:prstGeom prst="rect">
-            <a:avLst/>
-          </a:prstGeom>
-          <a:solidFill>
-            <a:srgbClr val="F4F8FC"/>
-          </a:solidFill>
-          <a:ln w="12700">
-            <a:solidFill>
-              <a:srgbClr val="E2E8F0"/>
-            </a:solidFill>
-            <a:prstDash val="solid"/>
-          </a:ln>
-        </p:spPr>
-      </p:sp>
-      <p:sp>
-        <p:nvSpPr>
-          <p:cNvPr id="14" name="Text 12"/>
-          <p:cNvSpPr/>
-          <p:nvPr/>
-        </p:nvSpPr>
-        <p:spPr>
-          <a:xfrm>
-            <a:off x="457200" y="2139696"/>
-            <a:ext cx="1828800" cy="548640"/>
-          </a:xfrm>
-          <a:prstGeom prst="rect">
-            <a:avLst/>
-          </a:prstGeom>
-          <a:noFill/>
-          <a:ln/>
-        </p:spPr>
-        <p:txBody>
-          <a:bodyPr wrap="square" rtlCol="0" anchor="ctr"/>
-          <a:lstStyle/>
-          <a:p>
-            <a:pPr marL="0" indent="0">
-              <a:buNone/>
-            </a:pPr>
-            <a:r>
-              <a:rPr lang="en-US" sz="1200" b="1" dirty="0">
-                <a:solidFill>
-                  <a:srgbClr val="2E75B6"/>
-                </a:solidFill>
-                <a:latin typeface="Calibri" pitchFamily="34" charset="0"/>
-                <a:ea typeface="Calibri" pitchFamily="34" charset="-122"/>
-                <a:cs typeface="Calibri" pitchFamily="34" charset="-120"/>
-              </a:rPr>
-              <a:t>YOLOv8</a:t>
-            </a:r>
-            <a:endParaRPr lang="en-US" sz="1200" dirty="0"/>
-          </a:p>
-        </p:txBody>
-      </p:sp>
-      <p:sp>
-        <p:nvSpPr>
-          <p:cNvPr id="15" name="Text 13"/>
-          <p:cNvSpPr/>
-          <p:nvPr/>
-        </p:nvSpPr>
-        <p:spPr>
-          <a:xfrm>
-            <a:off x="2377440" y="2139696"/>
-            <a:ext cx="2560320" cy="548640"/>
-          </a:xfrm>
-          <a:prstGeom prst="rect">
-            <a:avLst/>
-          </a:prstGeom>
-          <a:noFill/>
-          <a:ln/>
-        </p:spPr>
-        <p:txBody>
-          <a:bodyPr wrap="square" rtlCol="0" anchor="ctr"/>
-          <a:lstStyle/>
-          <a:p>
-            <a:pPr marL="0" indent="0">
-              <a:buNone/>
-            </a:pPr>
-            <a:r>
-              <a:rPr lang="en-US" sz="1100" dirty="0">
-                <a:solidFill>
-                  <a:srgbClr val="1B2A4A"/>
-                </a:solidFill>
-                <a:latin typeface="Calibri" pitchFamily="34" charset="0"/>
-                <a:ea typeface="Calibri" pitchFamily="34" charset="-122"/>
-                <a:cs typeface="Calibri" pitchFamily="34" charset="-120"/>
-              </a:rPr>
-              <a:t>Object / plate detection</a:t>
-            </a:r>
-            <a:endParaRPr lang="en-US" sz="1100" dirty="0"/>
-          </a:p>
-        </p:txBody>
-      </p:sp>
-      <p:sp>
-        <p:nvSpPr>
-          <p:cNvPr id="16" name="Text 14"/>
-          <p:cNvSpPr/>
-          <p:nvPr/>
-        </p:nvSpPr>
-        <p:spPr>
-          <a:xfrm>
-            <a:off x="5029200" y="2139696"/>
-            <a:ext cx="3657600" cy="548640"/>
-          </a:xfrm>
-          <a:prstGeom prst="rect">
-            <a:avLst/>
-          </a:prstGeom>
-          <a:noFill/>
-          <a:ln/>
-        </p:spPr>
-        <p:txBody>
-          <a:bodyPr wrap="square" rtlCol="0" anchor="ctr"/>
-          <a:lstStyle/>
-          <a:p>
-            <a:pPr marL="0" indent="0">
-              <a:buNone/>
-            </a:pPr>
-            <a:r>
-              <a:rPr lang="en-US" sz="1000" dirty="0">
-                <a:solidFill>
-                  <a:srgbClr val="64748B"/>
-                </a:solidFill>
-                <a:latin typeface="Calibri" pitchFamily="34" charset="0"/>
-                <a:ea typeface="Calibri" pitchFamily="34" charset="-122"/>
-                <a:cs typeface="Calibri" pitchFamily="34" charset="-120"/>
-              </a:rPr>
-              <a:t>Finds where the number plate is inside the image</a:t>
-            </a:r>
-            <a:endParaRPr lang="en-US" sz="1000" dirty="0"/>
-          </a:p>
-        </p:txBody>
-      </p:sp>
-      <p:sp>
-        <p:nvSpPr>
-          <p:cNvPr id="17" name="Shape 15"/>
-          <p:cNvSpPr/>
-          <p:nvPr/>
-        </p:nvSpPr>
-        <p:spPr>
-          <a:xfrm>
-            <a:off x="365760" y="2706624"/>
-            <a:ext cx="8412480" cy="548640"/>
-          </a:xfrm>
-          <a:prstGeom prst="rect">
-            <a:avLst/>
-          </a:prstGeom>
-          <a:solidFill>
-            <a:srgbClr val="FFFFFF"/>
-          </a:solidFill>
-          <a:ln w="12700">
-            <a:solidFill>
-              <a:srgbClr val="E2E8F0"/>
-            </a:solidFill>
-            <a:prstDash val="solid"/>
-          </a:ln>
-        </p:spPr>
-      </p:sp>
-      <p:sp>
-        <p:nvSpPr>
-          <p:cNvPr id="18" name="Text 16"/>
-          <p:cNvSpPr/>
-          <p:nvPr/>
-        </p:nvSpPr>
-        <p:spPr>
-          <a:xfrm>
-            <a:off x="457200" y="2706624"/>
-            <a:ext cx="1828800" cy="548640"/>
-          </a:xfrm>
-          <a:prstGeom prst="rect">
-            <a:avLst/>
-          </a:prstGeom>
-          <a:noFill/>
-          <a:ln/>
-        </p:spPr>
-        <p:txBody>
-          <a:bodyPr wrap="square" rtlCol="0" anchor="ctr"/>
-          <a:lstStyle/>
-          <a:p>
-            <a:pPr marL="0" indent="0">
-              <a:buNone/>
-            </a:pPr>
-            <a:r>
-              <a:rPr lang="en-US" sz="1200" b="1" dirty="0">
-                <a:solidFill>
-                  <a:srgbClr val="2E75B6"/>
-                </a:solidFill>
-                <a:latin typeface="Calibri" pitchFamily="34" charset="0"/>
-                <a:ea typeface="Calibri" pitchFamily="34" charset="-122"/>
-                <a:cs typeface="Calibri" pitchFamily="34" charset="-120"/>
-              </a:rPr>
-              <a:t>Tesseract / EasyOCR</a:t>
-            </a:r>
-            <a:endParaRPr lang="en-US" sz="1200" dirty="0"/>
-          </a:p>
-        </p:txBody>
-      </p:sp>
-      <p:sp>
-        <p:nvSpPr>
-          <p:cNvPr id="19" name="Text 17"/>
-          <p:cNvSpPr/>
-          <p:nvPr/>
-        </p:nvSpPr>
-        <p:spPr>
-          <a:xfrm>
-            <a:off x="2377440" y="2706624"/>
-            <a:ext cx="2560320" cy="548640"/>
-          </a:xfrm>
-          <a:prstGeom prst="rect">
-            <a:avLst/>
-          </a:prstGeom>
-          <a:noFill/>
-          <a:ln/>
-        </p:spPr>
-        <p:txBody>
-          <a:bodyPr wrap="square" rtlCol="0" anchor="ctr"/>
-          <a:lstStyle/>
-          <a:p>
-            <a:pPr marL="0" indent="0">
-              <a:buNone/>
-            </a:pPr>
-            <a:r>
-              <a:rPr lang="en-US" sz="1100" dirty="0">
-                <a:solidFill>
-                  <a:srgbClr val="1B2A4A"/>
-                </a:solidFill>
-                <a:latin typeface="Calibri" pitchFamily="34" charset="0"/>
-                <a:ea typeface="Calibri" pitchFamily="34" charset="-122"/>
-                <a:cs typeface="Calibri" pitchFamily="34" charset="-120"/>
-              </a:rPr>
-              <a:t>Text recognition</a:t>
-            </a:r>
-            <a:endParaRPr lang="en-US" sz="1100" dirty="0"/>
-          </a:p>
-        </p:txBody>
-      </p:sp>
-      <p:sp>
-        <p:nvSpPr>
-          <p:cNvPr id="20" name="Text 18"/>
-          <p:cNvSpPr/>
-          <p:nvPr/>
-        </p:nvSpPr>
-        <p:spPr>
-          <a:xfrm>
-            <a:off x="5029200" y="2706624"/>
-            <a:ext cx="3657600" cy="548640"/>
-          </a:xfrm>
-          <a:prstGeom prst="rect">
-            <a:avLst/>
-          </a:prstGeom>
-          <a:noFill/>
-          <a:ln/>
-        </p:spPr>
-        <p:txBody>
-          <a:bodyPr wrap="square" rtlCol="0" anchor="ctr"/>
-          <a:lstStyle/>
-          <a:p>
-            <a:pPr marL="0" indent="0">
-              <a:buNone/>
-            </a:pPr>
-            <a:r>
-              <a:rPr lang="en-US" sz="1000" dirty="0">
-                <a:solidFill>
-                  <a:srgbClr val="64748B"/>
-                </a:solidFill>
-                <a:latin typeface="Calibri" pitchFamily="34" charset="0"/>
-                <a:ea typeface="Calibri" pitchFamily="34" charset="-122"/>
-                <a:cs typeface="Calibri" pitchFamily="34" charset="-120"/>
-              </a:rPr>
-              <a:t>Reads the actual plate characters from the cropped image</a:t>
-            </a:r>
-            <a:endParaRPr lang="en-US" sz="1000" dirty="0"/>
-          </a:p>
-        </p:txBody>
-      </p:sp>
-      <p:sp>
-        <p:nvSpPr>
-          <p:cNvPr id="21" name="Shape 19"/>
-          <p:cNvSpPr/>
-          <p:nvPr/>
-        </p:nvSpPr>
-        <p:spPr>
-          <a:xfrm>
-            <a:off x="365760" y="3273552"/>
-            <a:ext cx="8412480" cy="548640"/>
-          </a:xfrm>
-          <a:prstGeom prst="rect">
-            <a:avLst/>
-          </a:prstGeom>
-          <a:solidFill>
-            <a:srgbClr val="F4F8FC"/>
-          </a:solidFill>
-          <a:ln w="12700">
-            <a:solidFill>
-              <a:srgbClr val="E2E8F0"/>
-            </a:solidFill>
-            <a:prstDash val="solid"/>
-          </a:ln>
-        </p:spPr>
-      </p:sp>
-      <p:sp>
-        <p:nvSpPr>
-          <p:cNvPr id="22" name="Text 20"/>
-          <p:cNvSpPr/>
-          <p:nvPr/>
-        </p:nvSpPr>
-        <p:spPr>
-          <a:xfrm>
-            <a:off x="457200" y="3273552"/>
-            <a:ext cx="1828800" cy="548640"/>
-          </a:xfrm>
-          <a:prstGeom prst="rect">
-            <a:avLst/>
-          </a:prstGeom>
-          <a:noFill/>
-          <a:ln/>
-        </p:spPr>
-        <p:txBody>
-          <a:bodyPr wrap="square" rtlCol="0" anchor="ctr"/>
-          <a:lstStyle/>
-          <a:p>
-            <a:pPr marL="0" indent="0">
-              <a:buNone/>
-            </a:pPr>
-            <a:r>
-              <a:rPr lang="en-US" sz="1200" b="1" dirty="0">
-                <a:solidFill>
-                  <a:srgbClr val="2E75B6"/>
-                </a:solidFill>
-                <a:latin typeface="Calibri" pitchFamily="34" charset="0"/>
-                <a:ea typeface="Calibri" pitchFamily="34" charset="-122"/>
-                <a:cs typeface="Calibri" pitchFamily="34" charset="-120"/>
-              </a:rPr>
-              <a:t>Django</a:t>
-            </a:r>
-            <a:endParaRPr lang="en-US" sz="1200" dirty="0"/>
-          </a:p>
-        </p:txBody>
-      </p:sp>
-      <p:sp>
-        <p:nvSpPr>
-          <p:cNvPr id="23" name="Text 21"/>
-          <p:cNvSpPr/>
-          <p:nvPr/>
-        </p:nvSpPr>
-        <p:spPr>
-          <a:xfrm>
-            <a:off x="2377440" y="3273552"/>
-            <a:ext cx="2560320" cy="548640"/>
-          </a:xfrm>
-          <a:prstGeom prst="rect">
-            <a:avLst/>
-          </a:prstGeom>
-          <a:noFill/>
-          <a:ln/>
-        </p:spPr>
-        <p:txBody>
-          <a:bodyPr wrap="square" rtlCol="0" anchor="ctr"/>
-          <a:lstStyle/>
-          <a:p>
-            <a:pPr marL="0" indent="0">
-              <a:buNone/>
-            </a:pPr>
-            <a:r>
-              <a:rPr lang="en-US" sz="1100" dirty="0">
-                <a:solidFill>
-                  <a:srgbClr val="1B2A4A"/>
-                </a:solidFill>
-                <a:latin typeface="Calibri" pitchFamily="34" charset="0"/>
-                <a:ea typeface="Calibri" pitchFamily="34" charset="-122"/>
-                <a:cs typeface="Calibri" pitchFamily="34" charset="-120"/>
-              </a:rPr>
-              <a:t>Web server / API</a:t>
-            </a:r>
-            <a:endParaRPr lang="en-US" sz="1100" dirty="0"/>
-          </a:p>
-        </p:txBody>
-      </p:sp>
-      <p:sp>
-        <p:nvSpPr>
-          <p:cNvPr id="24" name="Text 22"/>
-          <p:cNvSpPr/>
-          <p:nvPr/>
-        </p:nvSpPr>
-        <p:spPr>
-          <a:xfrm>
-            <a:off x="5029200" y="3273552"/>
-            <a:ext cx="3657600" cy="548640"/>
-          </a:xfrm>
-          <a:prstGeom prst="rect">
-            <a:avLst/>
-          </a:prstGeom>
-          <a:noFill/>
-          <a:ln/>
-        </p:spPr>
-        <p:txBody>
-          <a:bodyPr wrap="square" rtlCol="0" anchor="ctr"/>
-          <a:lstStyle/>
-          <a:p>
-            <a:pPr marL="0" indent="0">
-              <a:buNone/>
-            </a:pPr>
-            <a:r>
-              <a:rPr lang="en-US" sz="1000" dirty="0">
-                <a:solidFill>
-                  <a:srgbClr val="64748B"/>
-                </a:solidFill>
-                <a:latin typeface="Calibri" pitchFamily="34" charset="0"/>
-                <a:ea typeface="Calibri" pitchFamily="34" charset="-122"/>
-                <a:cs typeface="Calibri" pitchFamily="34" charset="-120"/>
-              </a:rPr>
-              <a:t>Handles requests from the camera, gate, and website</a:t>
-            </a:r>
-            <a:endParaRPr lang="en-US" sz="1000" dirty="0"/>
-          </a:p>
-        </p:txBody>
-      </p:sp>
-      <p:sp>
-        <p:nvSpPr>
-          <p:cNvPr id="25" name="Shape 23"/>
-          <p:cNvSpPr/>
-          <p:nvPr/>
-        </p:nvSpPr>
-        <p:spPr>
-          <a:xfrm>
-            <a:off x="365760" y="3840480"/>
-            <a:ext cx="8412480" cy="548640"/>
-          </a:xfrm>
-          <a:prstGeom prst="rect">
-            <a:avLst/>
-          </a:prstGeom>
-          <a:solidFill>
-            <a:srgbClr val="FFFFFF"/>
-          </a:solidFill>
-          <a:ln w="12700">
-            <a:solidFill>
-              <a:srgbClr val="E2E8F0"/>
-            </a:solidFill>
-            <a:prstDash val="solid"/>
-          </a:ln>
-        </p:spPr>
-      </p:sp>
-      <p:sp>
-        <p:nvSpPr>
-          <p:cNvPr id="26" name="Text 24"/>
-          <p:cNvSpPr/>
-          <p:nvPr/>
-        </p:nvSpPr>
-        <p:spPr>
-          <a:xfrm>
-            <a:off x="457200" y="3840480"/>
-            <a:ext cx="1828800" cy="548640"/>
-          </a:xfrm>
-          <a:prstGeom prst="rect">
-            <a:avLst/>
-          </a:prstGeom>
-          <a:noFill/>
-          <a:ln/>
-        </p:spPr>
-        <p:txBody>
-          <a:bodyPr wrap="square" rtlCol="0" anchor="ctr"/>
-          <a:lstStyle/>
-          <a:p>
-            <a:pPr marL="0" indent="0">
-              <a:buNone/>
-            </a:pPr>
-            <a:r>
-              <a:rPr lang="en-US" sz="1200" b="1" dirty="0">
-                <a:solidFill>
-                  <a:srgbClr val="2E75B6"/>
-                </a:solidFill>
-                <a:latin typeface="Calibri" pitchFamily="34" charset="0"/>
-                <a:ea typeface="Calibri" pitchFamily="34" charset="-122"/>
-                <a:cs typeface="Calibri" pitchFamily="34" charset="-120"/>
-              </a:rPr>
-              <a:t>SQLite / MySQL</a:t>
-            </a:r>
-            <a:endParaRPr lang="en-US" sz="1200" dirty="0"/>
-          </a:p>
-        </p:txBody>
-      </p:sp>
-      <p:sp>
-        <p:nvSpPr>
-          <p:cNvPr id="27" name="Text 25"/>
-          <p:cNvSpPr/>
-          <p:nvPr/>
-        </p:nvSpPr>
-        <p:spPr>
-          <a:xfrm>
-            <a:off x="2377440" y="3840480"/>
-            <a:ext cx="2560320" cy="548640"/>
-          </a:xfrm>
-          <a:prstGeom prst="rect">
-            <a:avLst/>
-          </a:prstGeom>
-          <a:noFill/>
-          <a:ln/>
-        </p:spPr>
-        <p:txBody>
-          <a:bodyPr wrap="square" rtlCol="0" anchor="ctr"/>
-          <a:lstStyle/>
-          <a:p>
-            <a:pPr marL="0" indent="0">
-              <a:buNone/>
-            </a:pPr>
-            <a:r>
-              <a:rPr lang="en-US" sz="1100" dirty="0">
-                <a:solidFill>
-                  <a:srgbClr val="1B2A4A"/>
-                </a:solidFill>
-                <a:latin typeface="Calibri" pitchFamily="34" charset="0"/>
-                <a:ea typeface="Calibri" pitchFamily="34" charset="-122"/>
-                <a:cs typeface="Calibri" pitchFamily="34" charset="-120"/>
-              </a:rPr>
-              <a:t>Database</a:t>
-            </a:r>
-            <a:endParaRPr lang="en-US" sz="1100" dirty="0"/>
-          </a:p>
-        </p:txBody>
-      </p:sp>
-      <p:sp>
-        <p:nvSpPr>
-          <p:cNvPr id="28" name="Text 26"/>
-          <p:cNvSpPr/>
-          <p:nvPr/>
-        </p:nvSpPr>
-        <p:spPr>
-          <a:xfrm>
-            <a:off x="5029200" y="3840480"/>
-            <a:ext cx="3657600" cy="548640"/>
-          </a:xfrm>
-          <a:prstGeom prst="rect">
-            <a:avLst/>
-          </a:prstGeom>
-          <a:noFill/>
-          <a:ln/>
-        </p:spPr>
-        <p:txBody>
-          <a:bodyPr wrap="square" rtlCol="0" anchor="ctr"/>
-          <a:lstStyle/>
-          <a:p>
-            <a:pPr marL="0" indent="0">
-              <a:buNone/>
-            </a:pPr>
-            <a:r>
-              <a:rPr lang="en-US" sz="1000" dirty="0">
-                <a:solidFill>
-                  <a:srgbClr val="64748B"/>
-                </a:solidFill>
-                <a:latin typeface="Calibri" pitchFamily="34" charset="0"/>
-                <a:ea typeface="Calibri" pitchFamily="34" charset="-122"/>
-                <a:cs typeface="Calibri" pitchFamily="34" charset="-120"/>
-              </a:rPr>
-              <a:t>Stores users, slots, and all entry/exit records</a:t>
-            </a:r>
-            <a:endParaRPr lang="en-US" sz="1000" dirty="0"/>
-          </a:p>
-        </p:txBody>
-      </p:sp>
-      <p:sp>
-        <p:nvSpPr>
-          <p:cNvPr id="29" name="Shape 27"/>
-          <p:cNvSpPr/>
-          <p:nvPr/>
-        </p:nvSpPr>
-        <p:spPr>
-          <a:xfrm>
-            <a:off x="365760" y="4407408"/>
-            <a:ext cx="8412480" cy="548640"/>
-          </a:xfrm>
-          <a:prstGeom prst="rect">
-            <a:avLst/>
-          </a:prstGeom>
-          <a:solidFill>
-            <a:srgbClr val="F4F8FC"/>
-          </a:solidFill>
-          <a:ln w="12700">
-            <a:solidFill>
-              <a:srgbClr val="E2E8F0"/>
-            </a:solidFill>
-            <a:prstDash val="solid"/>
-          </a:ln>
-        </p:spPr>
-      </p:sp>
-      <p:sp>
-        <p:nvSpPr>
-          <p:cNvPr id="30" name="Text 28"/>
-          <p:cNvSpPr/>
-          <p:nvPr/>
-        </p:nvSpPr>
-        <p:spPr>
-          <a:xfrm>
-            <a:off x="457200" y="4407408"/>
-            <a:ext cx="1828800" cy="548640"/>
-          </a:xfrm>
-          <a:prstGeom prst="rect">
-            <a:avLst/>
-          </a:prstGeom>
-          <a:noFill/>
-          <a:ln/>
-        </p:spPr>
-        <p:txBody>
-          <a:bodyPr wrap="square" rtlCol="0" anchor="ctr"/>
-          <a:lstStyle/>
-          <a:p>
-            <a:pPr marL="0" indent="0">
-              <a:buNone/>
-            </a:pPr>
-            <a:r>
-              <a:rPr lang="en-US" sz="1200" b="1" dirty="0">
-                <a:solidFill>
-                  <a:srgbClr val="2E75B6"/>
-                </a:solidFill>
-                <a:latin typeface="Calibri" pitchFamily="34" charset="0"/>
-                <a:ea typeface="Calibri" pitchFamily="34" charset="-122"/>
-                <a:cs typeface="Calibri" pitchFamily="34" charset="-120"/>
-              </a:rPr>
-              <a:t>HTML/CSS/JS</a:t>
-            </a:r>
-            <a:endParaRPr lang="en-US" sz="1200" dirty="0"/>
-          </a:p>
-        </p:txBody>
-      </p:sp>
-      <p:sp>
-        <p:nvSpPr>
-          <p:cNvPr id="31" name="Text 29"/>
-          <p:cNvSpPr/>
-          <p:nvPr/>
-        </p:nvSpPr>
-        <p:spPr>
-          <a:xfrm>
-            <a:off x="2377440" y="4407408"/>
-            <a:ext cx="2560320" cy="548640"/>
-          </a:xfrm>
-          <a:prstGeom prst="rect">
-            <a:avLst/>
-          </a:prstGeom>
-          <a:noFill/>
-          <a:ln/>
-        </p:spPr>
-        <p:txBody>
-          <a:bodyPr wrap="square" rtlCol="0" anchor="ctr"/>
-          <a:lstStyle/>
-          <a:p>
-            <a:pPr marL="0" indent="0">
-              <a:buNone/>
-            </a:pPr>
-            <a:r>
-              <a:rPr lang="en-US" sz="1100" dirty="0">
-                <a:solidFill>
-                  <a:srgbClr val="1B2A4A"/>
-                </a:solidFill>
-                <a:latin typeface="Calibri" pitchFamily="34" charset="0"/>
-                <a:ea typeface="Calibri" pitchFamily="34" charset="-122"/>
-                <a:cs typeface="Calibri" pitchFamily="34" charset="-120"/>
-              </a:rPr>
-              <a:t>Website(Frontend)</a:t>
-            </a:r>
-            <a:endParaRPr lang="en-US" sz="1100" dirty="0"/>
-          </a:p>
-        </p:txBody>
-      </p:sp>
-      <p:sp>
-        <p:nvSpPr>
-          <p:cNvPr id="32" name="Text 30"/>
-          <p:cNvSpPr/>
-          <p:nvPr/>
-        </p:nvSpPr>
-        <p:spPr>
-          <a:xfrm>
-            <a:off x="5029200" y="4407408"/>
-            <a:ext cx="3657600" cy="548640"/>
-          </a:xfrm>
-          <a:prstGeom prst="rect">
-            <a:avLst/>
-          </a:prstGeom>
-          <a:noFill/>
-          <a:ln/>
-        </p:spPr>
-        <p:txBody>
-          <a:bodyPr wrap="square" rtlCol="0" anchor="ctr"/>
-          <a:lstStyle/>
-          <a:p>
-            <a:pPr marL="0" indent="0">
-              <a:buNone/>
-            </a:pPr>
-            <a:r>
-              <a:rPr lang="en-US" sz="1000" dirty="0">
-                <a:solidFill>
-                  <a:srgbClr val="64748B"/>
-                </a:solidFill>
-                <a:latin typeface="Calibri" pitchFamily="34" charset="0"/>
-                <a:ea typeface="Calibri" pitchFamily="34" charset="-122"/>
-                <a:cs typeface="Calibri" pitchFamily="34" charset="-120"/>
-              </a:rPr>
-              <a:t>User-facing website for registration and payment</a:t>
             </a:r>
             <a:endParaRPr lang="en-US" sz="1000" dirty="0"/>
           </a:p>

--- a/resources/ANPR_First_Review_.pptx
+++ b/resources/ANPR_First_Review_.pptx
@@ -1982,6 +1982,45 @@
           <a:p>
             <a:pPr algn="ctr"/>
             <a:endParaRPr lang="en-US" sz="1100" dirty="0"/>
+          </a:p>
+        </p:txBody>
+      </p:sp>
+      <p:sp>
+        <p:nvSpPr>
+          <p:cNvPr id="11" name="TextBox 10">
+            <a:extLst>
+              <a:ext uri="{FF2B5EF4-FFF2-40B4-BE49-F238E27FC236}">
+                <a16:creationId xmlns:a16="http://schemas.microsoft.com/office/drawing/2014/main" id="{28E335CE-C0B9-911A-A51B-C2C676D33B21}"/>
+              </a:ext>
+            </a:extLst>
+          </p:cNvPr>
+          <p:cNvSpPr txBox="1"/>
+          <p:nvPr/>
+        </p:nvSpPr>
+        <p:spPr>
+          <a:xfrm>
+            <a:off x="7955280" y="4417572"/>
+            <a:ext cx="914400" cy="338554"/>
+          </a:xfrm>
+          <a:prstGeom prst="rect">
+            <a:avLst/>
+          </a:prstGeom>
+          <a:noFill/>
+        </p:spPr>
+        <p:txBody>
+          <a:bodyPr wrap="square" rtlCol="0">
+            <a:spAutoFit/>
+          </a:bodyPr>
+          <a:lstStyle/>
+          <a:p>
+            <a:r>
+              <a:rPr lang="en-IN" sz="1600" dirty="0">
+                <a:solidFill>
+                  <a:schemeClr val="bg1"/>
+                </a:solidFill>
+              </a:rPr>
+              <a:t>Group 1</a:t>
+            </a:r>
           </a:p>
         </p:txBody>
       </p:sp>
